--- a/assets/figures-editable/c3-c4/c4-e16.pptx
+++ b/assets/figures-editable/c3-c4/c4-e16.pptx
@@ -3104,8 +3104,8 @@
         </p:nvSpPr>
         <p:spPr>
           <a:xfrm>
-            <a:off x="274320" y="137160"/>
-            <a:ext cx="11612880" cy="365760"/>
+            <a:off x="274320" y="118872"/>
+            <a:ext cx="11612880" cy="340105"/>
           </a:xfrm>
           <a:prstGeom prst="rect">
             <a:avLst/>
@@ -3114,7 +3114,7 @@
           <a:effectLst/>
         </p:spPr>
         <p:txBody>
-          <a:bodyPr wrap="square" lIns="27432" rIns="27432" tIns="18288" bIns="18288" anchor="ctr">
+          <a:bodyPr wrap="none" lIns="18288" rIns="18288" tIns="18288" bIns="18288" anchor="t">
             <a:spAutoFit/>
           </a:bodyPr>
           <a:lstStyle/>
@@ -3125,7 +3125,7 @@
               </a:spcAft>
             </a:pPr>
             <a:r>
-              <a:rPr sz="2100" b="0" i="0">
+              <a:rPr sz="1900" b="1" i="0">
                 <a:solidFill>
                   <a:srgbClr val="8EDBD4"/>
                 </a:solidFill>
@@ -3144,13 +3144,13 @@
         </p:nvCxnSpPr>
         <p:spPr>
           <a:xfrm>
-            <a:off x="731520" y="2880360"/>
-            <a:ext cx="6675120" cy="0"/>
+            <a:off x="914400" y="4937760"/>
+            <a:ext cx="5669280" cy="0"/>
           </a:xfrm>
           <a:prstGeom prst="line">
             <a:avLst/>
           </a:prstGeom>
-          <a:ln w="25400">
+          <a:ln w="19050">
             <a:solidFill>
               <a:srgbClr val="B4C7D2"/>
             </a:solidFill>
@@ -3165,16 +3165,16 @@
           <p:nvPr/>
         </p:nvCxnSpPr>
         <p:spPr>
-          <a:xfrm flipV="1">
-            <a:off x="1005840" y="2876570"/>
-            <a:ext cx="76581" cy="3790"/>
+          <a:xfrm>
+            <a:off x="914400" y="1371600"/>
+            <a:ext cx="0" cy="3566160"/>
           </a:xfrm>
           <a:prstGeom prst="line">
             <a:avLst/>
           </a:prstGeom>
-          <a:ln w="25400">
+          <a:ln w="19050">
             <a:solidFill>
-              <a:srgbClr val="8EDBD4"/>
+              <a:srgbClr val="B4C7D2"/>
             </a:solidFill>
           </a:ln>
           <a:effectLst/>
@@ -3187,16 +3187,16 @@
           <p:nvPr/>
         </p:nvCxnSpPr>
         <p:spPr>
-          <a:xfrm flipV="1">
-            <a:off x="1082421" y="2865582"/>
-            <a:ext cx="76581" cy="10988"/>
+          <a:xfrm>
+            <a:off x="914400" y="4937760"/>
+            <a:ext cx="0" cy="64008"/>
           </a:xfrm>
           <a:prstGeom prst="line">
             <a:avLst/>
           </a:prstGeom>
-          <a:ln w="25400">
+          <a:ln w="12700">
             <a:solidFill>
-              <a:srgbClr val="8EDBD4"/>
+              <a:srgbClr val="B4C7D2"/>
             </a:solidFill>
           </a:ln>
           <a:effectLst/>
@@ -3209,43 +3209,61 @@
           <p:nvPr/>
         </p:nvCxnSpPr>
         <p:spPr>
-          <a:xfrm flipV="1">
-            <a:off x="1159002" y="2847958"/>
-            <a:ext cx="76581" cy="17624"/>
+          <a:xfrm>
+            <a:off x="914400" y="1371600"/>
+            <a:ext cx="0" cy="3566160"/>
           </a:xfrm>
           <a:prstGeom prst="line">
             <a:avLst/>
           </a:prstGeom>
-          <a:ln w="25400">
+          <a:ln w="7620">
             <a:solidFill>
-              <a:srgbClr val="8EDBD4"/>
+              <a:srgbClr val="2E4756"/>
             </a:solidFill>
           </a:ln>
           <a:effectLst/>
         </p:spPr>
       </p:cxnSp>
-      <p:cxnSp>
-        <p:nvCxnSpPr>
-          <p:cNvPr id="7" name="C4-E16 line 5" descr="sci-ppt:o005"/>
-          <p:cNvCxnSpPr/>
+      <p:sp>
+        <p:nvSpPr>
+          <p:cNvPr id="7" name="C4-E16 text 5" descr="sci-ppt:o005"/>
+          <p:cNvSpPr txBox="1"/>
           <p:nvPr/>
-        </p:nvCxnSpPr>
-        <p:spPr>
-          <a:xfrm flipV="1">
-            <a:off x="1235583" y="2824243"/>
-            <a:ext cx="76581" cy="23715"/>
-          </a:xfrm>
-          <a:prstGeom prst="line">
+        </p:nvSpPr>
+        <p:spPr>
+          <a:xfrm>
+            <a:off x="457200" y="5020056"/>
+            <a:ext cx="914400" cy="208407"/>
+          </a:xfrm>
+          <a:prstGeom prst="rect">
             <a:avLst/>
           </a:prstGeom>
-          <a:ln w="25400">
-            <a:solidFill>
-              <a:srgbClr val="8EDBD4"/>
-            </a:solidFill>
-          </a:ln>
+          <a:noFill/>
           <a:effectLst/>
         </p:spPr>
-      </p:cxnSp>
+        <p:txBody>
+          <a:bodyPr wrap="none" lIns="18288" rIns="18288" tIns="18288" bIns="18288" anchor="t">
+            <a:spAutoFit/>
+          </a:bodyPr>
+          <a:lstStyle/>
+          <a:p>
+            <a:pPr algn="ctr">
+              <a:spcAft>
+                <a:spcPts val="0"/>
+              </a:spcAft>
+            </a:pPr>
+            <a:r>
+              <a:rPr sz="1050" b="0" i="0">
+                <a:solidFill>
+                  <a:srgbClr val="B4C7D2"/>
+                </a:solidFill>
+                <a:latin typeface="Arial"/>
+              </a:rPr>
+              <a:t>0.00</a:t>
+            </a:r>
+          </a:p>
+        </p:txBody>
+      </p:sp>
       <p:cxnSp>
         <p:nvCxnSpPr>
           <p:cNvPr id="8" name="C4-E16 line 6" descr="sci-ppt:o006"/>
@@ -3253,16 +3271,16 @@
           <p:nvPr/>
         </p:nvCxnSpPr>
         <p:spPr>
-          <a:xfrm flipV="1">
-            <a:off x="1312164" y="2794969"/>
-            <a:ext cx="76581" cy="29274"/>
+          <a:xfrm>
+            <a:off x="2331720" y="4937760"/>
+            <a:ext cx="0" cy="64008"/>
           </a:xfrm>
           <a:prstGeom prst="line">
             <a:avLst/>
           </a:prstGeom>
-          <a:ln w="25400">
+          <a:ln w="12700">
             <a:solidFill>
-              <a:srgbClr val="8EDBD4"/>
+              <a:srgbClr val="B4C7D2"/>
             </a:solidFill>
           </a:ln>
           <a:effectLst/>
@@ -3275,43 +3293,61 @@
           <p:nvPr/>
         </p:nvCxnSpPr>
         <p:spPr>
-          <a:xfrm flipV="1">
-            <a:off x="1388745" y="2760655"/>
-            <a:ext cx="76581" cy="34314"/>
+          <a:xfrm>
+            <a:off x="2331720" y="1371600"/>
+            <a:ext cx="0" cy="3566160"/>
           </a:xfrm>
           <a:prstGeom prst="line">
             <a:avLst/>
           </a:prstGeom>
-          <a:ln w="25400">
+          <a:ln w="7620">
             <a:solidFill>
-              <a:srgbClr val="8EDBD4"/>
+              <a:srgbClr val="2E4756"/>
             </a:solidFill>
           </a:ln>
           <a:effectLst/>
         </p:spPr>
       </p:cxnSp>
-      <p:cxnSp>
-        <p:nvCxnSpPr>
-          <p:cNvPr id="10" name="C4-E16 line 8" descr="sci-ppt:o008"/>
-          <p:cNvCxnSpPr/>
+      <p:sp>
+        <p:nvSpPr>
+          <p:cNvPr id="10" name="C4-E16 text 8" descr="sci-ppt:o008"/>
+          <p:cNvSpPr txBox="1"/>
           <p:nvPr/>
-        </p:nvCxnSpPr>
-        <p:spPr>
-          <a:xfrm flipV="1">
-            <a:off x="1465326" y="2721802"/>
-            <a:ext cx="76581" cy="38853"/>
-          </a:xfrm>
-          <a:prstGeom prst="line">
+        </p:nvSpPr>
+        <p:spPr>
+          <a:xfrm>
+            <a:off x="1874519" y="5020056"/>
+            <a:ext cx="914400" cy="208407"/>
+          </a:xfrm>
+          <a:prstGeom prst="rect">
             <a:avLst/>
           </a:prstGeom>
-          <a:ln w="25400">
-            <a:solidFill>
-              <a:srgbClr val="8EDBD4"/>
-            </a:solidFill>
-          </a:ln>
+          <a:noFill/>
           <a:effectLst/>
         </p:spPr>
-      </p:cxnSp>
+        <p:txBody>
+          <a:bodyPr wrap="none" lIns="18288" rIns="18288" tIns="18288" bIns="18288" anchor="t">
+            <a:spAutoFit/>
+          </a:bodyPr>
+          <a:lstStyle/>
+          <a:p>
+            <a:pPr algn="ctr">
+              <a:spcAft>
+                <a:spcPts val="0"/>
+              </a:spcAft>
+            </a:pPr>
+            <a:r>
+              <a:rPr sz="1050" b="0" i="0">
+                <a:solidFill>
+                  <a:srgbClr val="B4C7D2"/>
+                </a:solidFill>
+                <a:latin typeface="Arial"/>
+              </a:rPr>
+              <a:t>0.25</a:t>
+            </a:r>
+          </a:p>
+        </p:txBody>
+      </p:sp>
       <p:cxnSp>
         <p:nvCxnSpPr>
           <p:cNvPr id="11" name="C4-E16 line 9" descr="sci-ppt:o009"/>
@@ -3319,16 +3355,16 @@
           <p:nvPr/>
         </p:nvCxnSpPr>
         <p:spPr>
-          <a:xfrm flipV="1">
-            <a:off x="1541907" y="2678899"/>
-            <a:ext cx="76581" cy="42903"/>
+          <a:xfrm>
+            <a:off x="3749039" y="4937760"/>
+            <a:ext cx="0" cy="64008"/>
           </a:xfrm>
           <a:prstGeom prst="line">
             <a:avLst/>
           </a:prstGeom>
-          <a:ln w="25400">
+          <a:ln w="12700">
             <a:solidFill>
-              <a:srgbClr val="8EDBD4"/>
+              <a:srgbClr val="B4C7D2"/>
             </a:solidFill>
           </a:ln>
           <a:effectLst/>
@@ -3341,43 +3377,61 @@
           <p:nvPr/>
         </p:nvCxnSpPr>
         <p:spPr>
-          <a:xfrm flipV="1">
-            <a:off x="1618488" y="2632419"/>
-            <a:ext cx="76581" cy="46480"/>
+          <a:xfrm>
+            <a:off x="3749039" y="1371600"/>
+            <a:ext cx="0" cy="3566160"/>
           </a:xfrm>
           <a:prstGeom prst="line">
             <a:avLst/>
           </a:prstGeom>
-          <a:ln w="25400">
+          <a:ln w="7620">
             <a:solidFill>
-              <a:srgbClr val="8EDBD4"/>
+              <a:srgbClr val="2E4756"/>
             </a:solidFill>
           </a:ln>
           <a:effectLst/>
         </p:spPr>
       </p:cxnSp>
-      <p:cxnSp>
-        <p:nvCxnSpPr>
-          <p:cNvPr id="13" name="C4-E16 line 11" descr="sci-ppt:o011"/>
-          <p:cNvCxnSpPr/>
+      <p:sp>
+        <p:nvSpPr>
+          <p:cNvPr id="13" name="C4-E16 text 11" descr="sci-ppt:o011"/>
+          <p:cNvSpPr txBox="1"/>
           <p:nvPr/>
-        </p:nvCxnSpPr>
-        <p:spPr>
-          <a:xfrm flipV="1">
-            <a:off x="1695069" y="2582822"/>
-            <a:ext cx="76581" cy="49597"/>
-          </a:xfrm>
-          <a:prstGeom prst="line">
+        </p:nvSpPr>
+        <p:spPr>
+          <a:xfrm>
+            <a:off x="3291839" y="5020056"/>
+            <a:ext cx="914400" cy="208407"/>
+          </a:xfrm>
+          <a:prstGeom prst="rect">
             <a:avLst/>
           </a:prstGeom>
-          <a:ln w="25400">
-            <a:solidFill>
-              <a:srgbClr val="8EDBD4"/>
-            </a:solidFill>
-          </a:ln>
+          <a:noFill/>
           <a:effectLst/>
         </p:spPr>
-      </p:cxnSp>
+        <p:txBody>
+          <a:bodyPr wrap="none" lIns="18288" rIns="18288" tIns="18288" bIns="18288" anchor="t">
+            <a:spAutoFit/>
+          </a:bodyPr>
+          <a:lstStyle/>
+          <a:p>
+            <a:pPr algn="ctr">
+              <a:spcAft>
+                <a:spcPts val="0"/>
+              </a:spcAft>
+            </a:pPr>
+            <a:r>
+              <a:rPr sz="1050" b="0" i="0">
+                <a:solidFill>
+                  <a:srgbClr val="B4C7D2"/>
+                </a:solidFill>
+                <a:latin typeface="Arial"/>
+              </a:rPr>
+              <a:t>0.50</a:t>
+            </a:r>
+          </a:p>
+        </p:txBody>
+      </p:sp>
       <p:cxnSp>
         <p:nvCxnSpPr>
           <p:cNvPr id="14" name="C4-E16 line 12" descr="sci-ppt:o012"/>
@@ -3385,16 +3439,16 @@
           <p:nvPr/>
         </p:nvCxnSpPr>
         <p:spPr>
-          <a:xfrm flipV="1">
-            <a:off x="1771650" y="2530552"/>
-            <a:ext cx="76581" cy="52270"/>
+          <a:xfrm>
+            <a:off x="5166360" y="4937760"/>
+            <a:ext cx="0" cy="64008"/>
           </a:xfrm>
           <a:prstGeom prst="line">
             <a:avLst/>
           </a:prstGeom>
-          <a:ln w="25400">
+          <a:ln w="12700">
             <a:solidFill>
-              <a:srgbClr val="8EDBD4"/>
+              <a:srgbClr val="B4C7D2"/>
             </a:solidFill>
           </a:ln>
           <a:effectLst/>
@@ -3407,43 +3461,61 @@
           <p:nvPr/>
         </p:nvCxnSpPr>
         <p:spPr>
-          <a:xfrm flipV="1">
-            <a:off x="1848231" y="2476039"/>
-            <a:ext cx="76581" cy="54513"/>
+          <a:xfrm>
+            <a:off x="5166360" y="1371600"/>
+            <a:ext cx="0" cy="3566160"/>
           </a:xfrm>
           <a:prstGeom prst="line">
             <a:avLst/>
           </a:prstGeom>
-          <a:ln w="25400">
+          <a:ln w="7620">
             <a:solidFill>
-              <a:srgbClr val="8EDBD4"/>
+              <a:srgbClr val="2E4756"/>
             </a:solidFill>
           </a:ln>
           <a:effectLst/>
         </p:spPr>
       </p:cxnSp>
-      <p:cxnSp>
-        <p:nvCxnSpPr>
-          <p:cNvPr id="16" name="C4-E16 line 14" descr="sci-ppt:o014"/>
-          <p:cNvCxnSpPr/>
+      <p:sp>
+        <p:nvSpPr>
+          <p:cNvPr id="16" name="C4-E16 text 14" descr="sci-ppt:o014"/>
+          <p:cNvSpPr txBox="1"/>
           <p:nvPr/>
-        </p:nvCxnSpPr>
-        <p:spPr>
-          <a:xfrm flipV="1">
-            <a:off x="1924812" y="2419698"/>
-            <a:ext cx="76581" cy="56341"/>
-          </a:xfrm>
-          <a:prstGeom prst="line">
+        </p:nvSpPr>
+        <p:spPr>
+          <a:xfrm>
+            <a:off x="4709160" y="5020056"/>
+            <a:ext cx="914400" cy="208407"/>
+          </a:xfrm>
+          <a:prstGeom prst="rect">
             <a:avLst/>
           </a:prstGeom>
-          <a:ln w="25400">
-            <a:solidFill>
-              <a:srgbClr val="8EDBD4"/>
-            </a:solidFill>
-          </a:ln>
+          <a:noFill/>
           <a:effectLst/>
         </p:spPr>
-      </p:cxnSp>
+        <p:txBody>
+          <a:bodyPr wrap="none" lIns="18288" rIns="18288" tIns="18288" bIns="18288" anchor="t">
+            <a:spAutoFit/>
+          </a:bodyPr>
+          <a:lstStyle/>
+          <a:p>
+            <a:pPr algn="ctr">
+              <a:spcAft>
+                <a:spcPts val="0"/>
+              </a:spcAft>
+            </a:pPr>
+            <a:r>
+              <a:rPr sz="1050" b="0" i="0">
+                <a:solidFill>
+                  <a:srgbClr val="B4C7D2"/>
+                </a:solidFill>
+                <a:latin typeface="Arial"/>
+              </a:rPr>
+              <a:t>0.75</a:t>
+            </a:r>
+          </a:p>
+        </p:txBody>
+      </p:sp>
       <p:cxnSp>
         <p:nvCxnSpPr>
           <p:cNvPr id="17" name="C4-E16 line 15" descr="sci-ppt:o015"/>
@@ -3451,16 +3523,16 @@
           <p:nvPr/>
         </p:nvCxnSpPr>
         <p:spPr>
-          <a:xfrm flipV="1">
-            <a:off x="2001393" y="2361931"/>
-            <a:ext cx="76581" cy="57767"/>
+          <a:xfrm>
+            <a:off x="6583680" y="4937760"/>
+            <a:ext cx="0" cy="64008"/>
           </a:xfrm>
           <a:prstGeom prst="line">
             <a:avLst/>
           </a:prstGeom>
-          <a:ln w="25400">
+          <a:ln w="12700">
             <a:solidFill>
-              <a:srgbClr val="8EDBD4"/>
+              <a:srgbClr val="B4C7D2"/>
             </a:solidFill>
           </a:ln>
           <a:effectLst/>
@@ -3473,43 +3545,61 @@
           <p:nvPr/>
         </p:nvCxnSpPr>
         <p:spPr>
-          <a:xfrm flipV="1">
-            <a:off x="2077974" y="2303122"/>
-            <a:ext cx="76581" cy="58809"/>
+          <a:xfrm>
+            <a:off x="6583680" y="1371600"/>
+            <a:ext cx="0" cy="3566160"/>
           </a:xfrm>
           <a:prstGeom prst="line">
             <a:avLst/>
           </a:prstGeom>
-          <a:ln w="25400">
+          <a:ln w="7620">
             <a:solidFill>
-              <a:srgbClr val="8EDBD4"/>
+              <a:srgbClr val="2E4756"/>
             </a:solidFill>
           </a:ln>
           <a:effectLst/>
         </p:spPr>
       </p:cxnSp>
-      <p:cxnSp>
-        <p:nvCxnSpPr>
-          <p:cNvPr id="19" name="C4-E16 line 17" descr="sci-ppt:o017"/>
-          <p:cNvCxnSpPr/>
+      <p:sp>
+        <p:nvSpPr>
+          <p:cNvPr id="19" name="C4-E16 text 17" descr="sci-ppt:o017"/>
+          <p:cNvSpPr txBox="1"/>
           <p:nvPr/>
-        </p:nvCxnSpPr>
-        <p:spPr>
-          <a:xfrm flipV="1">
-            <a:off x="2154555" y="2243644"/>
-            <a:ext cx="76581" cy="59478"/>
-          </a:xfrm>
-          <a:prstGeom prst="line">
+        </p:nvSpPr>
+        <p:spPr>
+          <a:xfrm>
+            <a:off x="6126480" y="5020056"/>
+            <a:ext cx="914400" cy="208407"/>
+          </a:xfrm>
+          <a:prstGeom prst="rect">
             <a:avLst/>
           </a:prstGeom>
-          <a:ln w="25400">
-            <a:solidFill>
-              <a:srgbClr val="8EDBD4"/>
-            </a:solidFill>
-          </a:ln>
+          <a:noFill/>
           <a:effectLst/>
         </p:spPr>
-      </p:cxnSp>
+        <p:txBody>
+          <a:bodyPr wrap="none" lIns="18288" rIns="18288" tIns="18288" bIns="18288" anchor="t">
+            <a:spAutoFit/>
+          </a:bodyPr>
+          <a:lstStyle/>
+          <a:p>
+            <a:pPr algn="ctr">
+              <a:spcAft>
+                <a:spcPts val="0"/>
+              </a:spcAft>
+            </a:pPr>
+            <a:r>
+              <a:rPr sz="1050" b="0" i="0">
+                <a:solidFill>
+                  <a:srgbClr val="B4C7D2"/>
+                </a:solidFill>
+                <a:latin typeface="Arial"/>
+              </a:rPr>
+              <a:t>1.00</a:t>
+            </a:r>
+          </a:p>
+        </p:txBody>
+      </p:sp>
       <p:cxnSp>
         <p:nvCxnSpPr>
           <p:cNvPr id="20" name="C4-E16 line 18" descr="sci-ppt:o018"/>
@@ -3517,16 +3607,16 @@
           <p:nvPr/>
         </p:nvCxnSpPr>
         <p:spPr>
-          <a:xfrm flipV="1">
-            <a:off x="2231136" y="2183855"/>
-            <a:ext cx="76581" cy="59789"/>
+          <a:xfrm>
+            <a:off x="850392" y="4937760"/>
+            <a:ext cx="64008" cy="0"/>
           </a:xfrm>
           <a:prstGeom prst="line">
             <a:avLst/>
           </a:prstGeom>
-          <a:ln w="25400">
+          <a:ln w="12700">
             <a:solidFill>
-              <a:srgbClr val="8EDBD4"/>
+              <a:srgbClr val="B4C7D2"/>
             </a:solidFill>
           </a:ln>
           <a:effectLst/>
@@ -3539,16 +3629,16 @@
           <p:nvPr/>
         </p:nvCxnSpPr>
         <p:spPr>
-          <a:xfrm flipV="1">
-            <a:off x="2307717" y="2124095"/>
-            <a:ext cx="76581" cy="59760"/>
+          <a:xfrm>
+            <a:off x="850392" y="3316778"/>
+            <a:ext cx="64008" cy="0"/>
           </a:xfrm>
           <a:prstGeom prst="line">
             <a:avLst/>
           </a:prstGeom>
-          <a:ln w="25400">
+          <a:ln w="12700">
             <a:solidFill>
-              <a:srgbClr val="8EDBD4"/>
+              <a:srgbClr val="B4C7D2"/>
             </a:solidFill>
           </a:ln>
           <a:effectLst/>
@@ -3561,43 +3651,61 @@
           <p:nvPr/>
         </p:nvCxnSpPr>
         <p:spPr>
-          <a:xfrm flipV="1">
-            <a:off x="2384298" y="2064694"/>
-            <a:ext cx="76581" cy="59401"/>
+          <a:xfrm>
+            <a:off x="914400" y="3316778"/>
+            <a:ext cx="5669280" cy="0"/>
           </a:xfrm>
           <a:prstGeom prst="line">
             <a:avLst/>
           </a:prstGeom>
-          <a:ln w="25400">
+          <a:ln w="7620">
             <a:solidFill>
-              <a:srgbClr val="8EDBD4"/>
+              <a:srgbClr val="2E4756"/>
             </a:solidFill>
           </a:ln>
           <a:effectLst/>
         </p:spPr>
       </p:cxnSp>
-      <p:cxnSp>
-        <p:nvCxnSpPr>
-          <p:cNvPr id="23" name="C4-E16 line 21" descr="sci-ppt:o021"/>
-          <p:cNvCxnSpPr/>
+      <p:sp>
+        <p:nvSpPr>
+          <p:cNvPr id="23" name="C4-E16 text 21" descr="sci-ppt:o021"/>
+          <p:cNvSpPr txBox="1"/>
           <p:nvPr/>
-        </p:nvCxnSpPr>
-        <p:spPr>
-          <a:xfrm flipV="1">
-            <a:off x="2460879" y="2005965"/>
-            <a:ext cx="76581" cy="58729"/>
-          </a:xfrm>
-          <a:prstGeom prst="line">
+        </p:nvSpPr>
+        <p:spPr>
+          <a:xfrm>
+            <a:off x="45720" y="3234482"/>
+            <a:ext cx="777240" cy="208407"/>
+          </a:xfrm>
+          <a:prstGeom prst="rect">
             <a:avLst/>
           </a:prstGeom>
-          <a:ln w="25400">
-            <a:solidFill>
-              <a:srgbClr val="8EDBD4"/>
-            </a:solidFill>
-          </a:ln>
+          <a:noFill/>
           <a:effectLst/>
         </p:spPr>
-      </p:cxnSp>
+        <p:txBody>
+          <a:bodyPr wrap="none" lIns="18288" rIns="18288" tIns="18288" bIns="18288" anchor="t">
+            <a:spAutoFit/>
+          </a:bodyPr>
+          <a:lstStyle/>
+          <a:p>
+            <a:pPr algn="r">
+              <a:spcAft>
+                <a:spcPts val="0"/>
+              </a:spcAft>
+            </a:pPr>
+            <a:r>
+              <a:rPr sz="1050" b="0" i="0">
+                <a:solidFill>
+                  <a:srgbClr val="B4C7D2"/>
+                </a:solidFill>
+                <a:latin typeface="Arial"/>
+              </a:rPr>
+              <a:t>0.5</a:t>
+            </a:r>
+          </a:p>
+        </p:txBody>
+      </p:sp>
       <p:cxnSp>
         <p:nvCxnSpPr>
           <p:cNvPr id="24" name="C4-E16 line 22" descr="sci-ppt:o022"/>
@@ -3605,16 +3713,16 @@
           <p:nvPr/>
         </p:nvCxnSpPr>
         <p:spPr>
-          <a:xfrm flipV="1">
-            <a:off x="2537460" y="1948205"/>
-            <a:ext cx="76581" cy="57760"/>
+          <a:xfrm>
+            <a:off x="850392" y="1695796"/>
+            <a:ext cx="64008" cy="0"/>
           </a:xfrm>
           <a:prstGeom prst="line">
             <a:avLst/>
           </a:prstGeom>
-          <a:ln w="25400">
+          <a:ln w="12700">
             <a:solidFill>
-              <a:srgbClr val="8EDBD4"/>
+              <a:srgbClr val="B4C7D2"/>
             </a:solidFill>
           </a:ln>
           <a:effectLst/>
@@ -3627,1321 +3735,947 @@
           <p:nvPr/>
         </p:nvCxnSpPr>
         <p:spPr>
-          <a:xfrm flipV="1">
-            <a:off x="2614041" y="1891701"/>
-            <a:ext cx="76581" cy="56504"/>
+          <a:xfrm>
+            <a:off x="914400" y="1695796"/>
+            <a:ext cx="5669280" cy="0"/>
           </a:xfrm>
           <a:prstGeom prst="line">
             <a:avLst/>
           </a:prstGeom>
-          <a:ln w="25400">
+          <a:ln w="7620">
+            <a:solidFill>
+              <a:srgbClr val="2E4756"/>
+            </a:solidFill>
+          </a:ln>
+          <a:effectLst/>
+        </p:spPr>
+      </p:cxnSp>
+      <p:sp>
+        <p:nvSpPr>
+          <p:cNvPr id="26" name="C4-E16 text 24" descr="sci-ppt:o024"/>
+          <p:cNvSpPr txBox="1"/>
+          <p:nvPr/>
+        </p:nvSpPr>
+        <p:spPr>
+          <a:xfrm>
+            <a:off x="45720" y="1613500"/>
+            <a:ext cx="777240" cy="208407"/>
+          </a:xfrm>
+          <a:prstGeom prst="rect">
+            <a:avLst/>
+          </a:prstGeom>
+          <a:noFill/>
+          <a:effectLst/>
+        </p:spPr>
+        <p:txBody>
+          <a:bodyPr wrap="none" lIns="18288" rIns="18288" tIns="18288" bIns="18288" anchor="t">
+            <a:spAutoFit/>
+          </a:bodyPr>
+          <a:lstStyle/>
+          <a:p>
+            <a:pPr algn="r">
+              <a:spcAft>
+                <a:spcPts val="0"/>
+              </a:spcAft>
+            </a:pPr>
+            <a:r>
+              <a:rPr sz="1050" b="0" i="0">
+                <a:solidFill>
+                  <a:srgbClr val="B4C7D2"/>
+                </a:solidFill>
+                <a:latin typeface="Arial"/>
+              </a:rPr>
+              <a:t>1.0</a:t>
+            </a:r>
+          </a:p>
+        </p:txBody>
+      </p:sp>
+      <p:sp>
+        <p:nvSpPr>
+          <p:cNvPr id="27" name="C4-E16 text 25" descr="sci-ppt:o025"/>
+          <p:cNvSpPr txBox="1"/>
+          <p:nvPr/>
+        </p:nvSpPr>
+        <p:spPr>
+          <a:xfrm>
+            <a:off x="914400" y="5221224"/>
+            <a:ext cx="5669280" cy="231648"/>
+          </a:xfrm>
+          <a:prstGeom prst="rect">
+            <a:avLst/>
+          </a:prstGeom>
+          <a:noFill/>
+          <a:effectLst/>
+        </p:spPr>
+        <p:txBody>
+          <a:bodyPr wrap="none" lIns="18288" rIns="18288" tIns="18288" bIns="18288" anchor="t">
+            <a:spAutoFit/>
+          </a:bodyPr>
+          <a:lstStyle/>
+          <a:p>
+            <a:pPr algn="ctr">
+              <a:spcAft>
+                <a:spcPts val="0"/>
+              </a:spcAft>
+            </a:pPr>
+            <a:r>
+              <a:rPr sz="1200" b="0" i="0">
+                <a:solidFill>
+                  <a:srgbClr val="E7F0F3"/>
+                </a:solidFill>
+                <a:latin typeface="Arial"/>
+              </a:rPr>
+              <a:t>r / b</a:t>
+            </a:r>
+          </a:p>
+        </p:txBody>
+      </p:sp>
+      <p:sp>
+        <p:nvSpPr>
+          <p:cNvPr id="28" name="C4-E16 text 26" descr="sci-ppt:o026"/>
+          <p:cNvSpPr txBox="1"/>
+          <p:nvPr/>
+        </p:nvSpPr>
+        <p:spPr>
+          <a:xfrm>
+            <a:off x="365760" y="1024128"/>
+            <a:ext cx="5669280" cy="231648"/>
+          </a:xfrm>
+          <a:prstGeom prst="rect">
+            <a:avLst/>
+          </a:prstGeom>
+          <a:noFill/>
+          <a:effectLst/>
+        </p:spPr>
+        <p:txBody>
+          <a:bodyPr wrap="none" lIns="18288" rIns="18288" tIns="18288" bIns="18288" anchor="t">
+            <a:spAutoFit/>
+          </a:bodyPr>
+          <a:lstStyle/>
+          <a:p>
+            <a:pPr algn="l">
+              <a:spcAft>
+                <a:spcPts val="0"/>
+              </a:spcAft>
+            </a:pPr>
+            <a:r>
+              <a:rPr sz="1200" b="0" i="0">
+                <a:solidFill>
+                  <a:srgbClr val="E7F0F3"/>
+                </a:solidFill>
+                <a:latin typeface="Arial"/>
+              </a:rPr>
+              <a:t>w(r) / w(0)</a:t>
+            </a:r>
+          </a:p>
+        </p:txBody>
+      </p:sp>
+      <p:sp>
+        <p:nvSpPr>
+          <p:cNvPr id="29" name="C4-E16 polygon 27" descr="sci-ppt:o027"/>
+          <p:cNvSpPr/>
+          <p:nvPr/>
+        </p:nvSpPr>
+        <p:spPr>
+          <a:xfrm>
+            <a:off x="914400" y="1695796"/>
+            <a:ext cx="5669280" cy="3241964"/>
+          </a:xfrm>
+          <a:custGeom>
+            <a:avLst/>
+            <a:gdLst/>
+            <a:ahLst/>
+            <a:cxnLst/>
+            <a:rect l="l" t="t" r="r" b="b"/>
+            <a:pathLst>
+              <a:path w="5669280" h="3241964">
+                <a:moveTo>
+                  <a:pt x="0" y="0"/>
+                </a:moveTo>
+                <a:lnTo>
+                  <a:pt x="28488" y="164"/>
+                </a:lnTo>
+                <a:lnTo>
+                  <a:pt x="56977" y="655"/>
+                </a:lnTo>
+                <a:lnTo>
+                  <a:pt x="85466" y="1473"/>
+                </a:lnTo>
+                <a:lnTo>
+                  <a:pt x="113955" y="2619"/>
+                </a:lnTo>
+                <a:lnTo>
+                  <a:pt x="142444" y="4092"/>
+                </a:lnTo>
+                <a:lnTo>
+                  <a:pt x="170933" y="5892"/>
+                </a:lnTo>
+                <a:lnTo>
+                  <a:pt x="199421" y="8018"/>
+                </a:lnTo>
+                <a:lnTo>
+                  <a:pt x="227910" y="10470"/>
+                </a:lnTo>
+                <a:lnTo>
+                  <a:pt x="256399" y="13249"/>
+                </a:lnTo>
+                <a:lnTo>
+                  <a:pt x="284888" y="16352"/>
+                </a:lnTo>
+                <a:lnTo>
+                  <a:pt x="313377" y="19781"/>
+                </a:lnTo>
+                <a:lnTo>
+                  <a:pt x="341866" y="23534"/>
+                </a:lnTo>
+                <a:lnTo>
+                  <a:pt x="370354" y="27611"/>
+                </a:lnTo>
+                <a:lnTo>
+                  <a:pt x="398843" y="32012"/>
+                </a:lnTo>
+                <a:lnTo>
+                  <a:pt x="427332" y="36735"/>
+                </a:lnTo>
+                <a:lnTo>
+                  <a:pt x="455821" y="41780"/>
+                </a:lnTo>
+                <a:lnTo>
+                  <a:pt x="484310" y="47146"/>
+                </a:lnTo>
+                <a:lnTo>
+                  <a:pt x="512799" y="52832"/>
+                </a:lnTo>
+                <a:lnTo>
+                  <a:pt x="541288" y="58837"/>
+                </a:lnTo>
+                <a:lnTo>
+                  <a:pt x="569776" y="65162"/>
+                </a:lnTo>
+                <a:lnTo>
+                  <a:pt x="598265" y="71803"/>
+                </a:lnTo>
+                <a:lnTo>
+                  <a:pt x="626754" y="78762"/>
+                </a:lnTo>
+                <a:lnTo>
+                  <a:pt x="655243" y="86035"/>
+                </a:lnTo>
+                <a:lnTo>
+                  <a:pt x="683732" y="93623"/>
+                </a:lnTo>
+                <a:lnTo>
+                  <a:pt x="712221" y="101524"/>
+                </a:lnTo>
+                <a:lnTo>
+                  <a:pt x="740709" y="109738"/>
+                </a:lnTo>
+                <a:lnTo>
+                  <a:pt x="769198" y="118261"/>
+                </a:lnTo>
+                <a:lnTo>
+                  <a:pt x="797687" y="127095"/>
+                </a:lnTo>
+                <a:lnTo>
+                  <a:pt x="826176" y="136236"/>
+                </a:lnTo>
+                <a:lnTo>
+                  <a:pt x="854665" y="145684"/>
+                </a:lnTo>
+                <a:lnTo>
+                  <a:pt x="883154" y="155437"/>
+                </a:lnTo>
+                <a:lnTo>
+                  <a:pt x="911643" y="165493"/>
+                </a:lnTo>
+                <a:lnTo>
+                  <a:pt x="940131" y="175852"/>
+                </a:lnTo>
+                <a:lnTo>
+                  <a:pt x="968620" y="186511"/>
+                </a:lnTo>
+                <a:lnTo>
+                  <a:pt x="997109" y="197469"/>
+                </a:lnTo>
+                <a:lnTo>
+                  <a:pt x="1025598" y="208724"/>
+                </a:lnTo>
+                <a:lnTo>
+                  <a:pt x="1054087" y="220274"/>
+                </a:lnTo>
+                <a:lnTo>
+                  <a:pt x="1082576" y="232117"/>
+                </a:lnTo>
+                <a:lnTo>
+                  <a:pt x="1111064" y="244253"/>
+                </a:lnTo>
+                <a:lnTo>
+                  <a:pt x="1139553" y="256678"/>
+                </a:lnTo>
+                <a:lnTo>
+                  <a:pt x="1168042" y="269391"/>
+                </a:lnTo>
+                <a:lnTo>
+                  <a:pt x="1196531" y="282389"/>
+                </a:lnTo>
+                <a:lnTo>
+                  <a:pt x="1225020" y="295672"/>
+                </a:lnTo>
+                <a:lnTo>
+                  <a:pt x="1253509" y="309236"/>
+                </a:lnTo>
+                <a:lnTo>
+                  <a:pt x="1281997" y="323079"/>
+                </a:lnTo>
+                <a:lnTo>
+                  <a:pt x="1310486" y="337199"/>
+                </a:lnTo>
+                <a:lnTo>
+                  <a:pt x="1338975" y="351595"/>
+                </a:lnTo>
+                <a:lnTo>
+                  <a:pt x="1367464" y="366263"/>
+                </a:lnTo>
+                <a:lnTo>
+                  <a:pt x="1395953" y="381202"/>
+                </a:lnTo>
+                <a:lnTo>
+                  <a:pt x="1424442" y="396408"/>
+                </a:lnTo>
+                <a:lnTo>
+                  <a:pt x="1452931" y="411880"/>
+                </a:lnTo>
+                <a:lnTo>
+                  <a:pt x="1481419" y="427615"/>
+                </a:lnTo>
+                <a:lnTo>
+                  <a:pt x="1509908" y="443610"/>
+                </a:lnTo>
+                <a:lnTo>
+                  <a:pt x="1538397" y="459863"/>
+                </a:lnTo>
+                <a:lnTo>
+                  <a:pt x="1566886" y="476371"/>
+                </a:lnTo>
+                <a:lnTo>
+                  <a:pt x="1595375" y="493131"/>
+                </a:lnTo>
+                <a:lnTo>
+                  <a:pt x="1623864" y="510141"/>
+                </a:lnTo>
+                <a:lnTo>
+                  <a:pt x="1652352" y="527398"/>
+                </a:lnTo>
+                <a:lnTo>
+                  <a:pt x="1680841" y="544899"/>
+                </a:lnTo>
+                <a:lnTo>
+                  <a:pt x="1709330" y="562641"/>
+                </a:lnTo>
+                <a:lnTo>
+                  <a:pt x="1737819" y="580621"/>
+                </a:lnTo>
+                <a:lnTo>
+                  <a:pt x="1766308" y="598837"/>
+                </a:lnTo>
+                <a:lnTo>
+                  <a:pt x="1794797" y="617284"/>
+                </a:lnTo>
+                <a:lnTo>
+                  <a:pt x="1823286" y="635961"/>
+                </a:lnTo>
+                <a:lnTo>
+                  <a:pt x="1851774" y="654863"/>
+                </a:lnTo>
+                <a:lnTo>
+                  <a:pt x="1880263" y="673988"/>
+                </a:lnTo>
+                <a:lnTo>
+                  <a:pt x="1908752" y="693332"/>
+                </a:lnTo>
+                <a:lnTo>
+                  <a:pt x="1937241" y="712893"/>
+                </a:lnTo>
+                <a:lnTo>
+                  <a:pt x="1965730" y="732666"/>
+                </a:lnTo>
+                <a:lnTo>
+                  <a:pt x="1994219" y="752649"/>
+                </a:lnTo>
+                <a:lnTo>
+                  <a:pt x="2022707" y="772837"/>
+                </a:lnTo>
+                <a:lnTo>
+                  <a:pt x="2051196" y="793228"/>
+                </a:lnTo>
+                <a:lnTo>
+                  <a:pt x="2079685" y="813818"/>
+                </a:lnTo>
+                <a:lnTo>
+                  <a:pt x="2108174" y="834603"/>
+                </a:lnTo>
+                <a:lnTo>
+                  <a:pt x="2136663" y="855579"/>
+                </a:lnTo>
+                <a:lnTo>
+                  <a:pt x="2165152" y="876744"/>
+                </a:lnTo>
+                <a:lnTo>
+                  <a:pt x="2193641" y="898093"/>
+                </a:lnTo>
+                <a:lnTo>
+                  <a:pt x="2222129" y="919622"/>
+                </a:lnTo>
+                <a:lnTo>
+                  <a:pt x="2250618" y="941327"/>
+                </a:lnTo>
+                <a:lnTo>
+                  <a:pt x="2279107" y="963206"/>
+                </a:lnTo>
+                <a:lnTo>
+                  <a:pt x="2307596" y="985253"/>
+                </a:lnTo>
+                <a:lnTo>
+                  <a:pt x="2336085" y="1007464"/>
+                </a:lnTo>
+                <a:lnTo>
+                  <a:pt x="2364574" y="1029837"/>
+                </a:lnTo>
+                <a:lnTo>
+                  <a:pt x="2393062" y="1052366"/>
+                </a:lnTo>
+                <a:lnTo>
+                  <a:pt x="2421551" y="1075047"/>
+                </a:lnTo>
+                <a:lnTo>
+                  <a:pt x="2450040" y="1097876"/>
+                </a:lnTo>
+                <a:lnTo>
+                  <a:pt x="2478529" y="1120850"/>
+                </a:lnTo>
+                <a:lnTo>
+                  <a:pt x="2507018" y="1143963"/>
+                </a:lnTo>
+                <a:lnTo>
+                  <a:pt x="2535507" y="1167212"/>
+                </a:lnTo>
+                <a:lnTo>
+                  <a:pt x="2563995" y="1190591"/>
+                </a:lnTo>
+                <a:lnTo>
+                  <a:pt x="2592484" y="1214097"/>
+                </a:lnTo>
+                <a:lnTo>
+                  <a:pt x="2620973" y="1237725"/>
+                </a:lnTo>
+                <a:lnTo>
+                  <a:pt x="2649462" y="1261471"/>
+                </a:lnTo>
+                <a:lnTo>
+                  <a:pt x="2677951" y="1285329"/>
+                </a:lnTo>
+                <a:lnTo>
+                  <a:pt x="2706440" y="1309296"/>
+                </a:lnTo>
+                <a:lnTo>
+                  <a:pt x="2734929" y="1333366"/>
+                </a:lnTo>
+                <a:lnTo>
+                  <a:pt x="2763417" y="1357535"/>
+                </a:lnTo>
+                <a:lnTo>
+                  <a:pt x="2791906" y="1381798"/>
+                </a:lnTo>
+                <a:lnTo>
+                  <a:pt x="2820395" y="1406151"/>
+                </a:lnTo>
+                <a:lnTo>
+                  <a:pt x="2848884" y="1430588"/>
+                </a:lnTo>
+                <a:lnTo>
+                  <a:pt x="2877373" y="1455104"/>
+                </a:lnTo>
+                <a:lnTo>
+                  <a:pt x="2905862" y="1479694"/>
+                </a:lnTo>
+                <a:lnTo>
+                  <a:pt x="2934350" y="1504354"/>
+                </a:lnTo>
+                <a:lnTo>
+                  <a:pt x="2962839" y="1529078"/>
+                </a:lnTo>
+                <a:lnTo>
+                  <a:pt x="2991328" y="1553861"/>
+                </a:lnTo>
+                <a:lnTo>
+                  <a:pt x="3019817" y="1578699"/>
+                </a:lnTo>
+                <a:lnTo>
+                  <a:pt x="3048306" y="1603585"/>
+                </a:lnTo>
+                <a:lnTo>
+                  <a:pt x="3076795" y="1628514"/>
+                </a:lnTo>
+                <a:lnTo>
+                  <a:pt x="3105284" y="1653482"/>
+                </a:lnTo>
+                <a:lnTo>
+                  <a:pt x="3133772" y="1678482"/>
+                </a:lnTo>
+                <a:lnTo>
+                  <a:pt x="3162261" y="1703509"/>
+                </a:lnTo>
+                <a:lnTo>
+                  <a:pt x="3190750" y="1728559"/>
+                </a:lnTo>
+                <a:lnTo>
+                  <a:pt x="3219239" y="1753624"/>
+                </a:lnTo>
+                <a:lnTo>
+                  <a:pt x="3247728" y="1778701"/>
+                </a:lnTo>
+                <a:lnTo>
+                  <a:pt x="3276217" y="1803782"/>
+                </a:lnTo>
+                <a:lnTo>
+                  <a:pt x="3304705" y="1828863"/>
+                </a:lnTo>
+                <a:lnTo>
+                  <a:pt x="3333194" y="1853937"/>
+                </a:lnTo>
+                <a:lnTo>
+                  <a:pt x="3361683" y="1878999"/>
+                </a:lnTo>
+                <a:lnTo>
+                  <a:pt x="3390172" y="1904044"/>
+                </a:lnTo>
+                <a:lnTo>
+                  <a:pt x="3418661" y="1929064"/>
+                </a:lnTo>
+                <a:lnTo>
+                  <a:pt x="3447150" y="1954055"/>
+                </a:lnTo>
+                <a:lnTo>
+                  <a:pt x="3475638" y="1979010"/>
+                </a:lnTo>
+                <a:lnTo>
+                  <a:pt x="3504127" y="2003923"/>
+                </a:lnTo>
+                <a:lnTo>
+                  <a:pt x="3532616" y="2028789"/>
+                </a:lnTo>
+                <a:lnTo>
+                  <a:pt x="3561105" y="2053600"/>
+                </a:lnTo>
+                <a:lnTo>
+                  <a:pt x="3589594" y="2078351"/>
+                </a:lnTo>
+                <a:lnTo>
+                  <a:pt x="3618083" y="2103036"/>
+                </a:lnTo>
+                <a:lnTo>
+                  <a:pt x="3646572" y="2127648"/>
+                </a:lnTo>
+                <a:lnTo>
+                  <a:pt x="3675060" y="2152182"/>
+                </a:lnTo>
+                <a:lnTo>
+                  <a:pt x="3703549" y="2176629"/>
+                </a:lnTo>
+                <a:lnTo>
+                  <a:pt x="3732038" y="2200986"/>
+                </a:lnTo>
+                <a:lnTo>
+                  <a:pt x="3760527" y="2225243"/>
+                </a:lnTo>
+                <a:lnTo>
+                  <a:pt x="3789016" y="2249396"/>
+                </a:lnTo>
+                <a:lnTo>
+                  <a:pt x="3817505" y="2273438"/>
+                </a:lnTo>
+                <a:lnTo>
+                  <a:pt x="3845993" y="2297362"/>
+                </a:lnTo>
+                <a:lnTo>
+                  <a:pt x="3874482" y="2321161"/>
+                </a:lnTo>
+                <a:lnTo>
+                  <a:pt x="3902971" y="2344829"/>
+                </a:lnTo>
+                <a:lnTo>
+                  <a:pt x="3931460" y="2368358"/>
+                </a:lnTo>
+                <a:lnTo>
+                  <a:pt x="3959949" y="2391743"/>
+                </a:lnTo>
+                <a:lnTo>
+                  <a:pt x="3988438" y="2414975"/>
+                </a:lnTo>
+                <a:lnTo>
+                  <a:pt x="4016927" y="2438049"/>
+                </a:lnTo>
+                <a:lnTo>
+                  <a:pt x="4045415" y="2460958"/>
+                </a:lnTo>
+                <a:lnTo>
+                  <a:pt x="4073904" y="2483693"/>
+                </a:lnTo>
+                <a:lnTo>
+                  <a:pt x="4102393" y="2506249"/>
+                </a:lnTo>
+                <a:lnTo>
+                  <a:pt x="4130882" y="2528617"/>
+                </a:lnTo>
+                <a:lnTo>
+                  <a:pt x="4159371" y="2550792"/>
+                </a:lnTo>
+                <a:lnTo>
+                  <a:pt x="4187860" y="2572765"/>
+                </a:lnTo>
+                <a:lnTo>
+                  <a:pt x="4216348" y="2594530"/>
+                </a:lnTo>
+                <a:lnTo>
+                  <a:pt x="4244837" y="2616079"/>
+                </a:lnTo>
+                <a:lnTo>
+                  <a:pt x="4273326" y="2637404"/>
+                </a:lnTo>
+                <a:lnTo>
+                  <a:pt x="4301815" y="2658499"/>
+                </a:lnTo>
+                <a:lnTo>
+                  <a:pt x="4330304" y="2679356"/>
+                </a:lnTo>
+                <a:lnTo>
+                  <a:pt x="4358793" y="2699967"/>
+                </a:lnTo>
+                <a:lnTo>
+                  <a:pt x="4387282" y="2720324"/>
+                </a:lnTo>
+                <a:lnTo>
+                  <a:pt x="4415770" y="2740421"/>
+                </a:lnTo>
+                <a:lnTo>
+                  <a:pt x="4444259" y="2760249"/>
+                </a:lnTo>
+                <a:lnTo>
+                  <a:pt x="4472748" y="2779801"/>
+                </a:lnTo>
+                <a:lnTo>
+                  <a:pt x="4501237" y="2799069"/>
+                </a:lnTo>
+                <a:lnTo>
+                  <a:pt x="4529726" y="2818045"/>
+                </a:lnTo>
+                <a:lnTo>
+                  <a:pt x="4558215" y="2836722"/>
+                </a:lnTo>
+                <a:lnTo>
+                  <a:pt x="4586703" y="2855091"/>
+                </a:lnTo>
+                <a:lnTo>
+                  <a:pt x="4615192" y="2873144"/>
+                </a:lnTo>
+                <a:lnTo>
+                  <a:pt x="4643681" y="2890874"/>
+                </a:lnTo>
+                <a:lnTo>
+                  <a:pt x="4672170" y="2908272"/>
+                </a:lnTo>
+                <a:lnTo>
+                  <a:pt x="4700659" y="2925330"/>
+                </a:lnTo>
+                <a:lnTo>
+                  <a:pt x="4729148" y="2942041"/>
+                </a:lnTo>
+                <a:lnTo>
+                  <a:pt x="4757636" y="2958395"/>
+                </a:lnTo>
+                <a:lnTo>
+                  <a:pt x="4786125" y="2974385"/>
+                </a:lnTo>
+                <a:lnTo>
+                  <a:pt x="4814614" y="2990002"/>
+                </a:lnTo>
+                <a:lnTo>
+                  <a:pt x="4843103" y="3005238"/>
+                </a:lnTo>
+                <a:lnTo>
+                  <a:pt x="4871592" y="3020085"/>
+                </a:lnTo>
+                <a:lnTo>
+                  <a:pt x="4900081" y="3034534"/>
+                </a:lnTo>
+                <a:lnTo>
+                  <a:pt x="4928570" y="3048576"/>
+                </a:lnTo>
+                <a:lnTo>
+                  <a:pt x="4957058" y="3062203"/>
+                </a:lnTo>
+                <a:lnTo>
+                  <a:pt x="4985547" y="3075407"/>
+                </a:lnTo>
+                <a:lnTo>
+                  <a:pt x="5014036" y="3088178"/>
+                </a:lnTo>
+                <a:lnTo>
+                  <a:pt x="5042525" y="3100509"/>
+                </a:lnTo>
+                <a:lnTo>
+                  <a:pt x="5071014" y="3112390"/>
+                </a:lnTo>
+                <a:lnTo>
+                  <a:pt x="5099503" y="3123812"/>
+                </a:lnTo>
+                <a:lnTo>
+                  <a:pt x="5127991" y="3134767"/>
+                </a:lnTo>
+                <a:lnTo>
+                  <a:pt x="5156480" y="3145245"/>
+                </a:lnTo>
+                <a:lnTo>
+                  <a:pt x="5184969" y="3155239"/>
+                </a:lnTo>
+                <a:lnTo>
+                  <a:pt x="5213458" y="3164738"/>
+                </a:lnTo>
+                <a:lnTo>
+                  <a:pt x="5241947" y="3173733"/>
+                </a:lnTo>
+                <a:lnTo>
+                  <a:pt x="5270436" y="3182217"/>
+                </a:lnTo>
+                <a:lnTo>
+                  <a:pt x="5298925" y="3190178"/>
+                </a:lnTo>
+                <a:lnTo>
+                  <a:pt x="5327413" y="3197609"/>
+                </a:lnTo>
+                <a:lnTo>
+                  <a:pt x="5355902" y="3204500"/>
+                </a:lnTo>
+                <a:lnTo>
+                  <a:pt x="5384391" y="3210842"/>
+                </a:lnTo>
+                <a:lnTo>
+                  <a:pt x="5412880" y="3216625"/>
+                </a:lnTo>
+                <a:lnTo>
+                  <a:pt x="5441369" y="3221840"/>
+                </a:lnTo>
+                <a:lnTo>
+                  <a:pt x="5469858" y="3226477"/>
+                </a:lnTo>
+                <a:lnTo>
+                  <a:pt x="5498346" y="3230528"/>
+                </a:lnTo>
+                <a:lnTo>
+                  <a:pt x="5526835" y="3233981"/>
+                </a:lnTo>
+                <a:lnTo>
+                  <a:pt x="5555324" y="3236829"/>
+                </a:lnTo>
+                <a:lnTo>
+                  <a:pt x="5583813" y="3239061"/>
+                </a:lnTo>
+                <a:lnTo>
+                  <a:pt x="5612302" y="3240667"/>
+                </a:lnTo>
+                <a:lnTo>
+                  <a:pt x="5640791" y="3241638"/>
+                </a:lnTo>
+                <a:lnTo>
+                  <a:pt x="5669280" y="3241964"/>
+                </a:lnTo>
+              </a:path>
+            </a:pathLst>
+          </a:custGeom>
+          <a:noFill/>
+          <a:ln w="43180">
             <a:solidFill>
               <a:srgbClr val="8EDBD4"/>
             </a:solidFill>
           </a:ln>
           <a:effectLst/>
         </p:spPr>
-      </p:cxnSp>
-      <p:cxnSp>
-        <p:nvCxnSpPr>
-          <p:cNvPr id="26" name="C4-E16 line 24" descr="sci-ppt:o024"/>
-          <p:cNvCxnSpPr/>
+        <p:txBody>
+          <a:bodyPr rtlCol="0" anchor="ctr"/>
+          <a:lstStyle/>
+          <a:p>
+            <a:pPr algn="ctr"/>
+          </a:p>
+        </p:txBody>
+      </p:sp>
+      <p:sp>
+        <p:nvSpPr>
+          <p:cNvPr id="30" name="C4-E16 ellipse 28" descr="sci-ppt:o028"/>
+          <p:cNvSpPr/>
           <p:nvPr/>
-        </p:nvCxnSpPr>
-        <p:spPr>
-          <a:xfrm flipV="1">
-            <a:off x="2690622" y="1836720"/>
-            <a:ext cx="76581" cy="54981"/>
-          </a:xfrm>
-          <a:prstGeom prst="line">
+        </p:nvSpPr>
+        <p:spPr>
+          <a:xfrm>
+            <a:off x="841248" y="1622644"/>
+            <a:ext cx="146304" cy="146304"/>
+          </a:xfrm>
+          <a:prstGeom prst="ellipse">
             <a:avLst/>
           </a:prstGeom>
-          <a:ln w="25400">
+          <a:solidFill>
+            <a:srgbClr val="F2B880"/>
+          </a:solidFill>
+          <a:ln w="12700">
+            <a:solidFill>
+              <a:srgbClr val="F2B880"/>
+            </a:solidFill>
+          </a:ln>
+          <a:effectLst/>
+        </p:spPr>
+        <p:txBody>
+          <a:bodyPr rtlCol="0" anchor="ctr"/>
+          <a:lstStyle/>
+          <a:p>
+            <a:pPr algn="ctr"/>
+          </a:p>
+        </p:txBody>
+      </p:sp>
+      <p:sp>
+        <p:nvSpPr>
+          <p:cNvPr id="31" name="C4-E16 text 29" descr="sci-ppt:o029"/>
+          <p:cNvSpPr txBox="1"/>
+          <p:nvPr/>
+        </p:nvSpPr>
+        <p:spPr>
+          <a:xfrm>
+            <a:off x="1005840" y="1558636"/>
+            <a:ext cx="2560320" cy="231648"/>
+          </a:xfrm>
+          <a:prstGeom prst="rect">
+            <a:avLst/>
+          </a:prstGeom>
+          <a:noFill/>
+          <a:effectLst/>
+        </p:spPr>
+        <p:txBody>
+          <a:bodyPr wrap="none" lIns="18288" rIns="18288" tIns="18288" bIns="18288" anchor="t">
+            <a:spAutoFit/>
+          </a:bodyPr>
+          <a:lstStyle/>
+          <a:p>
+            <a:pPr algn="l">
+              <a:spcAft>
+                <a:spcPts val="0"/>
+              </a:spcAft>
+            </a:pPr>
+            <a:r>
+              <a:rPr sz="1200" b="0" i="0">
+                <a:solidFill>
+                  <a:srgbClr val="F2B880"/>
+                </a:solidFill>
+                <a:latin typeface="Arial"/>
+              </a:rPr>
+              <a:t>w(0) = p₀b⁴/(64D_f)</a:t>
+            </a:r>
+          </a:p>
+        </p:txBody>
+      </p:sp>
+      <p:sp>
+        <p:nvSpPr>
+          <p:cNvPr id="32" name="C4-E16 ellipse 30" descr="sci-ppt:o030"/>
+          <p:cNvSpPr/>
+          <p:nvPr/>
+        </p:nvSpPr>
+        <p:spPr>
+          <a:xfrm>
+            <a:off x="6510528" y="4864608"/>
+            <a:ext cx="146304" cy="146304"/>
+          </a:xfrm>
+          <a:prstGeom prst="ellipse">
+            <a:avLst/>
+          </a:prstGeom>
+          <a:solidFill>
+            <a:srgbClr val="F28BA0"/>
+          </a:solidFill>
+          <a:ln w="12700">
+            <a:solidFill>
+              <a:srgbClr val="F28BA0"/>
+            </a:solidFill>
+          </a:ln>
+          <a:effectLst/>
+        </p:spPr>
+        <p:txBody>
+          <a:bodyPr rtlCol="0" anchor="ctr"/>
+          <a:lstStyle/>
+          <a:p>
+            <a:pPr algn="ctr"/>
+          </a:p>
+        </p:txBody>
+      </p:sp>
+      <p:sp>
+        <p:nvSpPr>
+          <p:cNvPr id="33" name="C4-E16 text 31" descr="sci-ppt:o031"/>
+          <p:cNvSpPr txBox="1"/>
+          <p:nvPr/>
+        </p:nvSpPr>
+        <p:spPr>
+          <a:xfrm>
+            <a:off x="1157630" y="4548724"/>
+            <a:ext cx="2743200" cy="231648"/>
+          </a:xfrm>
+          <a:prstGeom prst="rect">
+            <a:avLst/>
+          </a:prstGeom>
+          <a:noFill/>
+          <a:effectLst/>
+        </p:spPr>
+        <p:txBody>
+          <a:bodyPr wrap="none" lIns="18288" rIns="18288" tIns="18288" bIns="18288" anchor="t">
+            <a:spAutoFit/>
+          </a:bodyPr>
+          <a:lstStyle/>
+          <a:p>
+            <a:pPr algn="l">
+              <a:spcAft>
+                <a:spcPts val="0"/>
+              </a:spcAft>
+            </a:pPr>
+            <a:r>
+              <a:rPr sz="1200" b="0" i="0">
+                <a:solidFill>
+                  <a:srgbClr val="F28BA0"/>
+                </a:solidFill>
+                <a:latin typeface="Arial"/>
+              </a:rPr>
+              <a:t>clamped at r = b: w = w′ = 0</a:t>
+            </a:r>
+          </a:p>
+        </p:txBody>
+      </p:sp>
+      <p:sp>
+        <p:nvSpPr>
+          <p:cNvPr id="34" name="C4-E16 round_rect 32" descr="sci-ppt:o032"/>
+          <p:cNvSpPr/>
+          <p:nvPr/>
+        </p:nvSpPr>
+        <p:spPr>
+          <a:xfrm>
+            <a:off x="6858000" y="1371600"/>
+            <a:ext cx="4983480" cy="3566160"/>
+          </a:xfrm>
+          <a:prstGeom prst="roundRect">
+            <a:avLst/>
+          </a:prstGeom>
+          <a:solidFill>
+            <a:srgbClr val="213E4B"/>
+          </a:solidFill>
+          <a:ln w="20320">
             <a:solidFill>
               <a:srgbClr val="8EDBD4"/>
             </a:solidFill>
           </a:ln>
           <a:effectLst/>
         </p:spPr>
-      </p:cxnSp>
-      <p:cxnSp>
-        <p:nvCxnSpPr>
-          <p:cNvPr id="27" name="C4-E16 line 25" descr="sci-ppt:o025"/>
-          <p:cNvCxnSpPr/>
-          <p:nvPr/>
-        </p:nvCxnSpPr>
-        <p:spPr>
-          <a:xfrm flipV="1">
-            <a:off x="2767203" y="1783518"/>
-            <a:ext cx="76581" cy="53202"/>
-          </a:xfrm>
-          <a:prstGeom prst="line">
-            <a:avLst/>
-          </a:prstGeom>
-          <a:ln w="25400">
-            <a:solidFill>
-              <a:srgbClr val="8EDBD4"/>
-            </a:solidFill>
-          </a:ln>
-          <a:effectLst/>
-        </p:spPr>
-      </p:cxnSp>
-      <p:cxnSp>
-        <p:nvCxnSpPr>
-          <p:cNvPr id="28" name="C4-E16 line 26" descr="sci-ppt:o026"/>
-          <p:cNvCxnSpPr/>
-          <p:nvPr/>
-        </p:nvCxnSpPr>
-        <p:spPr>
-          <a:xfrm flipV="1">
-            <a:off x="2843784" y="1732337"/>
-            <a:ext cx="76581" cy="51181"/>
-          </a:xfrm>
-          <a:prstGeom prst="line">
-            <a:avLst/>
-          </a:prstGeom>
-          <a:ln w="25400">
-            <a:solidFill>
-              <a:srgbClr val="8EDBD4"/>
-            </a:solidFill>
-          </a:ln>
-          <a:effectLst/>
-        </p:spPr>
-      </p:cxnSp>
-      <p:cxnSp>
-        <p:nvCxnSpPr>
-          <p:cNvPr id="29" name="C4-E16 line 27" descr="sci-ppt:o027"/>
-          <p:cNvCxnSpPr/>
-          <p:nvPr/>
-        </p:nvCxnSpPr>
-        <p:spPr>
-          <a:xfrm flipV="1">
-            <a:off x="2920365" y="1683400"/>
-            <a:ext cx="76581" cy="48937"/>
-          </a:xfrm>
-          <a:prstGeom prst="line">
-            <a:avLst/>
-          </a:prstGeom>
-          <a:ln w="25400">
-            <a:solidFill>
-              <a:srgbClr val="8EDBD4"/>
-            </a:solidFill>
-          </a:ln>
-          <a:effectLst/>
-        </p:spPr>
-      </p:cxnSp>
-      <p:cxnSp>
-        <p:nvCxnSpPr>
-          <p:cNvPr id="30" name="C4-E16 line 28" descr="sci-ppt:o028"/>
-          <p:cNvCxnSpPr/>
-          <p:nvPr/>
-        </p:nvCxnSpPr>
-        <p:spPr>
-          <a:xfrm flipV="1">
-            <a:off x="2996946" y="1636921"/>
-            <a:ext cx="76581" cy="46479"/>
-          </a:xfrm>
-          <a:prstGeom prst="line">
-            <a:avLst/>
-          </a:prstGeom>
-          <a:ln w="25400">
-            <a:solidFill>
-              <a:srgbClr val="8EDBD4"/>
-            </a:solidFill>
-          </a:ln>
-          <a:effectLst/>
-        </p:spPr>
-      </p:cxnSp>
-      <p:cxnSp>
-        <p:nvCxnSpPr>
-          <p:cNvPr id="31" name="C4-E16 line 29" descr="sci-ppt:o029"/>
-          <p:cNvCxnSpPr/>
-          <p:nvPr/>
-        </p:nvCxnSpPr>
-        <p:spPr>
-          <a:xfrm flipV="1">
-            <a:off x="3073527" y="1593095"/>
-            <a:ext cx="76581" cy="43826"/>
-          </a:xfrm>
-          <a:prstGeom prst="line">
-            <a:avLst/>
-          </a:prstGeom>
-          <a:ln w="25400">
-            <a:solidFill>
-              <a:srgbClr val="8EDBD4"/>
-            </a:solidFill>
-          </a:ln>
-          <a:effectLst/>
-        </p:spPr>
-      </p:cxnSp>
-      <p:cxnSp>
-        <p:nvCxnSpPr>
-          <p:cNvPr id="32" name="C4-E16 line 30" descr="sci-ppt:o030"/>
-          <p:cNvCxnSpPr/>
-          <p:nvPr/>
-        </p:nvCxnSpPr>
-        <p:spPr>
-          <a:xfrm flipV="1">
-            <a:off x="3150108" y="1552104"/>
-            <a:ext cx="76581" cy="40991"/>
-          </a:xfrm>
-          <a:prstGeom prst="line">
-            <a:avLst/>
-          </a:prstGeom>
-          <a:ln w="25400">
-            <a:solidFill>
-              <a:srgbClr val="8EDBD4"/>
-            </a:solidFill>
-          </a:ln>
-          <a:effectLst/>
-        </p:spPr>
-      </p:cxnSp>
-      <p:cxnSp>
-        <p:nvCxnSpPr>
-          <p:cNvPr id="33" name="C4-E16 line 31" descr="sci-ppt:o031"/>
-          <p:cNvCxnSpPr/>
-          <p:nvPr/>
-        </p:nvCxnSpPr>
-        <p:spPr>
-          <a:xfrm flipV="1">
-            <a:off x="3226689" y="1514117"/>
-            <a:ext cx="76581" cy="37987"/>
-          </a:xfrm>
-          <a:prstGeom prst="line">
-            <a:avLst/>
-          </a:prstGeom>
-          <a:ln w="25400">
-            <a:solidFill>
-              <a:srgbClr val="8EDBD4"/>
-            </a:solidFill>
-          </a:ln>
-          <a:effectLst/>
-        </p:spPr>
-      </p:cxnSp>
-      <p:cxnSp>
-        <p:nvCxnSpPr>
-          <p:cNvPr id="34" name="C4-E16 line 32" descr="sci-ppt:o032"/>
-          <p:cNvCxnSpPr/>
-          <p:nvPr/>
-        </p:nvCxnSpPr>
-        <p:spPr>
-          <a:xfrm flipV="1">
-            <a:off x="3303270" y="1479287"/>
-            <a:ext cx="76581" cy="34830"/>
-          </a:xfrm>
-          <a:prstGeom prst="line">
-            <a:avLst/>
-          </a:prstGeom>
-          <a:ln w="25400">
-            <a:solidFill>
-              <a:srgbClr val="8EDBD4"/>
-            </a:solidFill>
-          </a:ln>
-          <a:effectLst/>
-        </p:spPr>
-      </p:cxnSp>
-      <p:cxnSp>
-        <p:nvCxnSpPr>
-          <p:cNvPr id="35" name="C4-E16 line 33" descr="sci-ppt:o033"/>
-          <p:cNvCxnSpPr/>
-          <p:nvPr/>
-        </p:nvCxnSpPr>
-        <p:spPr>
-          <a:xfrm flipV="1">
-            <a:off x="3379851" y="1447751"/>
-            <a:ext cx="76581" cy="31536"/>
-          </a:xfrm>
-          <a:prstGeom prst="line">
-            <a:avLst/>
-          </a:prstGeom>
-          <a:ln w="25400">
-            <a:solidFill>
-              <a:srgbClr val="8EDBD4"/>
-            </a:solidFill>
-          </a:ln>
-          <a:effectLst/>
-        </p:spPr>
-      </p:cxnSp>
-      <p:cxnSp>
-        <p:nvCxnSpPr>
-          <p:cNvPr id="36" name="C4-E16 line 34" descr="sci-ppt:o034"/>
-          <p:cNvCxnSpPr/>
-          <p:nvPr/>
-        </p:nvCxnSpPr>
-        <p:spPr>
-          <a:xfrm flipV="1">
-            <a:off x="3456432" y="1419633"/>
-            <a:ext cx="76581" cy="28118"/>
-          </a:xfrm>
-          <a:prstGeom prst="line">
-            <a:avLst/>
-          </a:prstGeom>
-          <a:ln w="25400">
-            <a:solidFill>
-              <a:srgbClr val="8EDBD4"/>
-            </a:solidFill>
-          </a:ln>
-          <a:effectLst/>
-        </p:spPr>
-      </p:cxnSp>
-      <p:cxnSp>
-        <p:nvCxnSpPr>
-          <p:cNvPr id="37" name="C4-E16 line 35" descr="sci-ppt:o035"/>
-          <p:cNvCxnSpPr/>
-          <p:nvPr/>
-        </p:nvCxnSpPr>
-        <p:spPr>
-          <a:xfrm flipV="1">
-            <a:off x="3533013" y="1395044"/>
-            <a:ext cx="76581" cy="24589"/>
-          </a:xfrm>
-          <a:prstGeom prst="line">
-            <a:avLst/>
-          </a:prstGeom>
-          <a:ln w="25400">
-            <a:solidFill>
-              <a:srgbClr val="8EDBD4"/>
-            </a:solidFill>
-          </a:ln>
-          <a:effectLst/>
-        </p:spPr>
-      </p:cxnSp>
-      <p:cxnSp>
-        <p:nvCxnSpPr>
-          <p:cNvPr id="38" name="C4-E16 line 36" descr="sci-ppt:o036"/>
-          <p:cNvCxnSpPr/>
-          <p:nvPr/>
-        </p:nvCxnSpPr>
-        <p:spPr>
-          <a:xfrm flipV="1">
-            <a:off x="3609594" y="1374077"/>
-            <a:ext cx="76581" cy="20967"/>
-          </a:xfrm>
-          <a:prstGeom prst="line">
-            <a:avLst/>
-          </a:prstGeom>
-          <a:ln w="25400">
-            <a:solidFill>
-              <a:srgbClr val="8EDBD4"/>
-            </a:solidFill>
-          </a:ln>
-          <a:effectLst/>
-        </p:spPr>
-      </p:cxnSp>
-      <p:cxnSp>
-        <p:nvCxnSpPr>
-          <p:cNvPr id="39" name="C4-E16 line 37" descr="sci-ppt:o037"/>
-          <p:cNvCxnSpPr/>
-          <p:nvPr/>
-        </p:nvCxnSpPr>
-        <p:spPr>
-          <a:xfrm flipV="1">
-            <a:off x="3686175" y="1356814"/>
-            <a:ext cx="76581" cy="17263"/>
-          </a:xfrm>
-          <a:prstGeom prst="line">
-            <a:avLst/>
-          </a:prstGeom>
-          <a:ln w="25400">
-            <a:solidFill>
-              <a:srgbClr val="8EDBD4"/>
-            </a:solidFill>
-          </a:ln>
-          <a:effectLst/>
-        </p:spPr>
-      </p:cxnSp>
-      <p:cxnSp>
-        <p:nvCxnSpPr>
-          <p:cNvPr id="40" name="C4-E16 line 38" descr="sci-ppt:o038"/>
-          <p:cNvCxnSpPr/>
-          <p:nvPr/>
-        </p:nvCxnSpPr>
-        <p:spPr>
-          <a:xfrm flipV="1">
-            <a:off x="3762756" y="1343318"/>
-            <a:ext cx="76581" cy="13496"/>
-          </a:xfrm>
-          <a:prstGeom prst="line">
-            <a:avLst/>
-          </a:prstGeom>
-          <a:ln w="25400">
-            <a:solidFill>
-              <a:srgbClr val="8EDBD4"/>
-            </a:solidFill>
-          </a:ln>
-          <a:effectLst/>
-        </p:spPr>
-      </p:cxnSp>
-      <p:cxnSp>
-        <p:nvCxnSpPr>
-          <p:cNvPr id="41" name="C4-E16 line 39" descr="sci-ppt:o039"/>
-          <p:cNvCxnSpPr/>
-          <p:nvPr/>
-        </p:nvCxnSpPr>
-        <p:spPr>
-          <a:xfrm flipV="1">
-            <a:off x="3839337" y="1333642"/>
-            <a:ext cx="76581" cy="9676"/>
-          </a:xfrm>
-          <a:prstGeom prst="line">
-            <a:avLst/>
-          </a:prstGeom>
-          <a:ln w="25400">
-            <a:solidFill>
-              <a:srgbClr val="8EDBD4"/>
-            </a:solidFill>
-          </a:ln>
-          <a:effectLst/>
-        </p:spPr>
-      </p:cxnSp>
-      <p:cxnSp>
-        <p:nvCxnSpPr>
-          <p:cNvPr id="42" name="C4-E16 line 40" descr="sci-ppt:o040"/>
-          <p:cNvCxnSpPr/>
-          <p:nvPr/>
-        </p:nvCxnSpPr>
-        <p:spPr>
-          <a:xfrm flipV="1">
-            <a:off x="3915918" y="1327822"/>
-            <a:ext cx="76581" cy="5820"/>
-          </a:xfrm>
-          <a:prstGeom prst="line">
-            <a:avLst/>
-          </a:prstGeom>
-          <a:ln w="25400">
-            <a:solidFill>
-              <a:srgbClr val="8EDBD4"/>
-            </a:solidFill>
-          </a:ln>
-          <a:effectLst/>
-        </p:spPr>
-      </p:cxnSp>
-      <p:cxnSp>
-        <p:nvCxnSpPr>
-          <p:cNvPr id="43" name="C4-E16 line 41" descr="sci-ppt:o041"/>
-          <p:cNvCxnSpPr/>
-          <p:nvPr/>
-        </p:nvCxnSpPr>
-        <p:spPr>
-          <a:xfrm flipV="1">
-            <a:off x="3992499" y="1325880"/>
-            <a:ext cx="76581" cy="1942"/>
-          </a:xfrm>
-          <a:prstGeom prst="line">
-            <a:avLst/>
-          </a:prstGeom>
-          <a:ln w="25400">
-            <a:solidFill>
-              <a:srgbClr val="8EDBD4"/>
-            </a:solidFill>
-          </a:ln>
-          <a:effectLst/>
-        </p:spPr>
-      </p:cxnSp>
-      <p:cxnSp>
-        <p:nvCxnSpPr>
-          <p:cNvPr id="44" name="C4-E16 line 42" descr="sci-ppt:o042"/>
-          <p:cNvCxnSpPr/>
-          <p:nvPr/>
-        </p:nvCxnSpPr>
-        <p:spPr>
-          <a:xfrm>
-            <a:off x="4069080" y="1325880"/>
-            <a:ext cx="76580" cy="1942"/>
-          </a:xfrm>
-          <a:prstGeom prst="line">
-            <a:avLst/>
-          </a:prstGeom>
-          <a:ln w="25400">
-            <a:solidFill>
-              <a:srgbClr val="8EDBD4"/>
-            </a:solidFill>
-          </a:ln>
-          <a:effectLst/>
-        </p:spPr>
-      </p:cxnSp>
-      <p:cxnSp>
-        <p:nvCxnSpPr>
-          <p:cNvPr id="45" name="C4-E16 line 43" descr="sci-ppt:o043"/>
-          <p:cNvCxnSpPr/>
-          <p:nvPr/>
-        </p:nvCxnSpPr>
-        <p:spPr>
-          <a:xfrm>
-            <a:off x="4145660" y="1327822"/>
-            <a:ext cx="76582" cy="5820"/>
-          </a:xfrm>
-          <a:prstGeom prst="line">
-            <a:avLst/>
-          </a:prstGeom>
-          <a:ln w="25400">
-            <a:solidFill>
-              <a:srgbClr val="8EDBD4"/>
-            </a:solidFill>
-          </a:ln>
-          <a:effectLst/>
-        </p:spPr>
-      </p:cxnSp>
-      <p:cxnSp>
-        <p:nvCxnSpPr>
-          <p:cNvPr id="46" name="C4-E16 line 44" descr="sci-ppt:o044"/>
-          <p:cNvCxnSpPr/>
-          <p:nvPr/>
-        </p:nvCxnSpPr>
-        <p:spPr>
-          <a:xfrm>
-            <a:off x="4222242" y="1333642"/>
-            <a:ext cx="76581" cy="9676"/>
-          </a:xfrm>
-          <a:prstGeom prst="line">
-            <a:avLst/>
-          </a:prstGeom>
-          <a:ln w="25400">
-            <a:solidFill>
-              <a:srgbClr val="8EDBD4"/>
-            </a:solidFill>
-          </a:ln>
-          <a:effectLst/>
-        </p:spPr>
-      </p:cxnSp>
-      <p:cxnSp>
-        <p:nvCxnSpPr>
-          <p:cNvPr id="47" name="C4-E16 line 45" descr="sci-ppt:o045"/>
-          <p:cNvCxnSpPr/>
-          <p:nvPr/>
-        </p:nvCxnSpPr>
-        <p:spPr>
-          <a:xfrm>
-            <a:off x="4298823" y="1343318"/>
-            <a:ext cx="76581" cy="13496"/>
-          </a:xfrm>
-          <a:prstGeom prst="line">
-            <a:avLst/>
-          </a:prstGeom>
-          <a:ln w="25400">
-            <a:solidFill>
-              <a:srgbClr val="8EDBD4"/>
-            </a:solidFill>
-          </a:ln>
-          <a:effectLst/>
-        </p:spPr>
-      </p:cxnSp>
-      <p:cxnSp>
-        <p:nvCxnSpPr>
-          <p:cNvPr id="48" name="C4-E16 line 46" descr="sci-ppt:o046"/>
-          <p:cNvCxnSpPr/>
-          <p:nvPr/>
-        </p:nvCxnSpPr>
-        <p:spPr>
-          <a:xfrm>
-            <a:off x="4375404" y="1356814"/>
-            <a:ext cx="76581" cy="17263"/>
-          </a:xfrm>
-          <a:prstGeom prst="line">
-            <a:avLst/>
-          </a:prstGeom>
-          <a:ln w="25400">
-            <a:solidFill>
-              <a:srgbClr val="8EDBD4"/>
-            </a:solidFill>
-          </a:ln>
-          <a:effectLst/>
-        </p:spPr>
-      </p:cxnSp>
-      <p:cxnSp>
-        <p:nvCxnSpPr>
-          <p:cNvPr id="49" name="C4-E16 line 47" descr="sci-ppt:o047"/>
-          <p:cNvCxnSpPr/>
-          <p:nvPr/>
-        </p:nvCxnSpPr>
-        <p:spPr>
-          <a:xfrm>
-            <a:off x="4451985" y="1374077"/>
-            <a:ext cx="76581" cy="20967"/>
-          </a:xfrm>
-          <a:prstGeom prst="line">
-            <a:avLst/>
-          </a:prstGeom>
-          <a:ln w="25400">
-            <a:solidFill>
-              <a:srgbClr val="8EDBD4"/>
-            </a:solidFill>
-          </a:ln>
-          <a:effectLst/>
-        </p:spPr>
-      </p:cxnSp>
-      <p:cxnSp>
-        <p:nvCxnSpPr>
-          <p:cNvPr id="50" name="C4-E16 line 48" descr="sci-ppt:o048"/>
-          <p:cNvCxnSpPr/>
-          <p:nvPr/>
-        </p:nvCxnSpPr>
-        <p:spPr>
-          <a:xfrm>
-            <a:off x="4528566" y="1395044"/>
-            <a:ext cx="76581" cy="24589"/>
-          </a:xfrm>
-          <a:prstGeom prst="line">
-            <a:avLst/>
-          </a:prstGeom>
-          <a:ln w="25400">
-            <a:solidFill>
-              <a:srgbClr val="8EDBD4"/>
-            </a:solidFill>
-          </a:ln>
-          <a:effectLst/>
-        </p:spPr>
-      </p:cxnSp>
-      <p:cxnSp>
-        <p:nvCxnSpPr>
-          <p:cNvPr id="51" name="C4-E16 line 49" descr="sci-ppt:o049"/>
-          <p:cNvCxnSpPr/>
-          <p:nvPr/>
-        </p:nvCxnSpPr>
-        <p:spPr>
-          <a:xfrm>
-            <a:off x="4605147" y="1419633"/>
-            <a:ext cx="76581" cy="28118"/>
-          </a:xfrm>
-          <a:prstGeom prst="line">
-            <a:avLst/>
-          </a:prstGeom>
-          <a:ln w="25400">
-            <a:solidFill>
-              <a:srgbClr val="8EDBD4"/>
-            </a:solidFill>
-          </a:ln>
-          <a:effectLst/>
-        </p:spPr>
-      </p:cxnSp>
-      <p:cxnSp>
-        <p:nvCxnSpPr>
-          <p:cNvPr id="52" name="C4-E16 line 50" descr="sci-ppt:o050"/>
-          <p:cNvCxnSpPr/>
-          <p:nvPr/>
-        </p:nvCxnSpPr>
-        <p:spPr>
-          <a:xfrm>
-            <a:off x="4681728" y="1447751"/>
-            <a:ext cx="76580" cy="31536"/>
-          </a:xfrm>
-          <a:prstGeom prst="line">
-            <a:avLst/>
-          </a:prstGeom>
-          <a:ln w="25400">
-            <a:solidFill>
-              <a:srgbClr val="8EDBD4"/>
-            </a:solidFill>
-          </a:ln>
-          <a:effectLst/>
-        </p:spPr>
-      </p:cxnSp>
-      <p:cxnSp>
-        <p:nvCxnSpPr>
-          <p:cNvPr id="53" name="C4-E16 line 51" descr="sci-ppt:o051"/>
-          <p:cNvCxnSpPr/>
-          <p:nvPr/>
-        </p:nvCxnSpPr>
-        <p:spPr>
-          <a:xfrm>
-            <a:off x="4758308" y="1479287"/>
-            <a:ext cx="76582" cy="34830"/>
-          </a:xfrm>
-          <a:prstGeom prst="line">
-            <a:avLst/>
-          </a:prstGeom>
-          <a:ln w="25400">
-            <a:solidFill>
-              <a:srgbClr val="8EDBD4"/>
-            </a:solidFill>
-          </a:ln>
-          <a:effectLst/>
-        </p:spPr>
-      </p:cxnSp>
-      <p:cxnSp>
-        <p:nvCxnSpPr>
-          <p:cNvPr id="54" name="C4-E16 line 52" descr="sci-ppt:o052"/>
-          <p:cNvCxnSpPr/>
-          <p:nvPr/>
-        </p:nvCxnSpPr>
-        <p:spPr>
-          <a:xfrm>
-            <a:off x="4834890" y="1514117"/>
-            <a:ext cx="76581" cy="37987"/>
-          </a:xfrm>
-          <a:prstGeom prst="line">
-            <a:avLst/>
-          </a:prstGeom>
-          <a:ln w="25400">
-            <a:solidFill>
-              <a:srgbClr val="8EDBD4"/>
-            </a:solidFill>
-          </a:ln>
-          <a:effectLst/>
-        </p:spPr>
-      </p:cxnSp>
-      <p:cxnSp>
-        <p:nvCxnSpPr>
-          <p:cNvPr id="55" name="C4-E16 line 53" descr="sci-ppt:o053"/>
-          <p:cNvCxnSpPr/>
-          <p:nvPr/>
-        </p:nvCxnSpPr>
-        <p:spPr>
-          <a:xfrm>
-            <a:off x="4911471" y="1552104"/>
-            <a:ext cx="76581" cy="40991"/>
-          </a:xfrm>
-          <a:prstGeom prst="line">
-            <a:avLst/>
-          </a:prstGeom>
-          <a:ln w="25400">
-            <a:solidFill>
-              <a:srgbClr val="8EDBD4"/>
-            </a:solidFill>
-          </a:ln>
-          <a:effectLst/>
-        </p:spPr>
-      </p:cxnSp>
-      <p:cxnSp>
-        <p:nvCxnSpPr>
-          <p:cNvPr id="56" name="C4-E16 line 54" descr="sci-ppt:o054"/>
-          <p:cNvCxnSpPr/>
-          <p:nvPr/>
-        </p:nvCxnSpPr>
-        <p:spPr>
-          <a:xfrm>
-            <a:off x="4988052" y="1593095"/>
-            <a:ext cx="76581" cy="43826"/>
-          </a:xfrm>
-          <a:prstGeom prst="line">
-            <a:avLst/>
-          </a:prstGeom>
-          <a:ln w="25400">
-            <a:solidFill>
-              <a:srgbClr val="8EDBD4"/>
-            </a:solidFill>
-          </a:ln>
-          <a:effectLst/>
-        </p:spPr>
-      </p:cxnSp>
-      <p:cxnSp>
-        <p:nvCxnSpPr>
-          <p:cNvPr id="57" name="C4-E16 line 55" descr="sci-ppt:o055"/>
-          <p:cNvCxnSpPr/>
-          <p:nvPr/>
-        </p:nvCxnSpPr>
-        <p:spPr>
-          <a:xfrm>
-            <a:off x="5064633" y="1636921"/>
-            <a:ext cx="76581" cy="46479"/>
-          </a:xfrm>
-          <a:prstGeom prst="line">
-            <a:avLst/>
-          </a:prstGeom>
-          <a:ln w="25400">
-            <a:solidFill>
-              <a:srgbClr val="8EDBD4"/>
-            </a:solidFill>
-          </a:ln>
-          <a:effectLst/>
-        </p:spPr>
-      </p:cxnSp>
-      <p:cxnSp>
-        <p:nvCxnSpPr>
-          <p:cNvPr id="58" name="C4-E16 line 56" descr="sci-ppt:o056"/>
-          <p:cNvCxnSpPr/>
-          <p:nvPr/>
-        </p:nvCxnSpPr>
-        <p:spPr>
-          <a:xfrm>
-            <a:off x="5141214" y="1683400"/>
-            <a:ext cx="76581" cy="48937"/>
-          </a:xfrm>
-          <a:prstGeom prst="line">
-            <a:avLst/>
-          </a:prstGeom>
-          <a:ln w="25400">
-            <a:solidFill>
-              <a:srgbClr val="8EDBD4"/>
-            </a:solidFill>
-          </a:ln>
-          <a:effectLst/>
-        </p:spPr>
-      </p:cxnSp>
-      <p:cxnSp>
-        <p:nvCxnSpPr>
-          <p:cNvPr id="59" name="C4-E16 line 57" descr="sci-ppt:o057"/>
-          <p:cNvCxnSpPr/>
-          <p:nvPr/>
-        </p:nvCxnSpPr>
-        <p:spPr>
-          <a:xfrm>
-            <a:off x="5217795" y="1732337"/>
-            <a:ext cx="76580" cy="51181"/>
-          </a:xfrm>
-          <a:prstGeom prst="line">
-            <a:avLst/>
-          </a:prstGeom>
-          <a:ln w="25400">
-            <a:solidFill>
-              <a:srgbClr val="8EDBD4"/>
-            </a:solidFill>
-          </a:ln>
-          <a:effectLst/>
-        </p:spPr>
-      </p:cxnSp>
-      <p:cxnSp>
-        <p:nvCxnSpPr>
-          <p:cNvPr id="60" name="C4-E16 line 58" descr="sci-ppt:o058"/>
-          <p:cNvCxnSpPr/>
-          <p:nvPr/>
-        </p:nvCxnSpPr>
-        <p:spPr>
-          <a:xfrm>
-            <a:off x="5294375" y="1783518"/>
-            <a:ext cx="76582" cy="53202"/>
-          </a:xfrm>
-          <a:prstGeom prst="line">
-            <a:avLst/>
-          </a:prstGeom>
-          <a:ln w="25400">
-            <a:solidFill>
-              <a:srgbClr val="8EDBD4"/>
-            </a:solidFill>
-          </a:ln>
-          <a:effectLst/>
-        </p:spPr>
-      </p:cxnSp>
-      <p:cxnSp>
-        <p:nvCxnSpPr>
-          <p:cNvPr id="61" name="C4-E16 line 59" descr="sci-ppt:o059"/>
-          <p:cNvCxnSpPr/>
-          <p:nvPr/>
-        </p:nvCxnSpPr>
-        <p:spPr>
-          <a:xfrm>
-            <a:off x="5370957" y="1836720"/>
-            <a:ext cx="76581" cy="54981"/>
-          </a:xfrm>
-          <a:prstGeom prst="line">
-            <a:avLst/>
-          </a:prstGeom>
-          <a:ln w="25400">
-            <a:solidFill>
-              <a:srgbClr val="8EDBD4"/>
-            </a:solidFill>
-          </a:ln>
-          <a:effectLst/>
-        </p:spPr>
-      </p:cxnSp>
-      <p:cxnSp>
-        <p:nvCxnSpPr>
-          <p:cNvPr id="62" name="C4-E16 line 60" descr="sci-ppt:o060"/>
-          <p:cNvCxnSpPr/>
-          <p:nvPr/>
-        </p:nvCxnSpPr>
-        <p:spPr>
-          <a:xfrm>
-            <a:off x="5447538" y="1891701"/>
-            <a:ext cx="76581" cy="56504"/>
-          </a:xfrm>
-          <a:prstGeom prst="line">
-            <a:avLst/>
-          </a:prstGeom>
-          <a:ln w="25400">
-            <a:solidFill>
-              <a:srgbClr val="8EDBD4"/>
-            </a:solidFill>
-          </a:ln>
-          <a:effectLst/>
-        </p:spPr>
-      </p:cxnSp>
-      <p:cxnSp>
-        <p:nvCxnSpPr>
-          <p:cNvPr id="63" name="C4-E16 line 61" descr="sci-ppt:o061"/>
-          <p:cNvCxnSpPr/>
-          <p:nvPr/>
-        </p:nvCxnSpPr>
-        <p:spPr>
-          <a:xfrm>
-            <a:off x="5524119" y="1948205"/>
-            <a:ext cx="76581" cy="57760"/>
-          </a:xfrm>
-          <a:prstGeom prst="line">
-            <a:avLst/>
-          </a:prstGeom>
-          <a:ln w="25400">
-            <a:solidFill>
-              <a:srgbClr val="8EDBD4"/>
-            </a:solidFill>
-          </a:ln>
-          <a:effectLst/>
-        </p:spPr>
-      </p:cxnSp>
-      <p:cxnSp>
-        <p:nvCxnSpPr>
-          <p:cNvPr id="64" name="C4-E16 line 62" descr="sci-ppt:o062"/>
-          <p:cNvCxnSpPr/>
-          <p:nvPr/>
-        </p:nvCxnSpPr>
-        <p:spPr>
-          <a:xfrm>
-            <a:off x="5600700" y="2005965"/>
-            <a:ext cx="76581" cy="58729"/>
-          </a:xfrm>
-          <a:prstGeom prst="line">
-            <a:avLst/>
-          </a:prstGeom>
-          <a:ln w="25400">
-            <a:solidFill>
-              <a:srgbClr val="8EDBD4"/>
-            </a:solidFill>
-          </a:ln>
-          <a:effectLst/>
-        </p:spPr>
-      </p:cxnSp>
-      <p:cxnSp>
-        <p:nvCxnSpPr>
-          <p:cNvPr id="65" name="C4-E16 line 63" descr="sci-ppt:o063"/>
-          <p:cNvCxnSpPr/>
-          <p:nvPr/>
-        </p:nvCxnSpPr>
-        <p:spPr>
-          <a:xfrm>
-            <a:off x="5677281" y="2064694"/>
-            <a:ext cx="76581" cy="59401"/>
-          </a:xfrm>
-          <a:prstGeom prst="line">
-            <a:avLst/>
-          </a:prstGeom>
-          <a:ln w="25400">
-            <a:solidFill>
-              <a:srgbClr val="8EDBD4"/>
-            </a:solidFill>
-          </a:ln>
-          <a:effectLst/>
-        </p:spPr>
-      </p:cxnSp>
-      <p:cxnSp>
-        <p:nvCxnSpPr>
-          <p:cNvPr id="66" name="C4-E16 line 64" descr="sci-ppt:o064"/>
-          <p:cNvCxnSpPr/>
-          <p:nvPr/>
-        </p:nvCxnSpPr>
-        <p:spPr>
-          <a:xfrm>
-            <a:off x="5753862" y="2124095"/>
-            <a:ext cx="76581" cy="59760"/>
-          </a:xfrm>
-          <a:prstGeom prst="line">
-            <a:avLst/>
-          </a:prstGeom>
-          <a:ln w="25400">
-            <a:solidFill>
-              <a:srgbClr val="8EDBD4"/>
-            </a:solidFill>
-          </a:ln>
-          <a:effectLst/>
-        </p:spPr>
-      </p:cxnSp>
-      <p:cxnSp>
-        <p:nvCxnSpPr>
-          <p:cNvPr id="67" name="C4-E16 line 65" descr="sci-ppt:o065"/>
-          <p:cNvCxnSpPr/>
-          <p:nvPr/>
-        </p:nvCxnSpPr>
-        <p:spPr>
-          <a:xfrm>
-            <a:off x="5830443" y="2183855"/>
-            <a:ext cx="76581" cy="59789"/>
-          </a:xfrm>
-          <a:prstGeom prst="line">
-            <a:avLst/>
-          </a:prstGeom>
-          <a:ln w="25400">
-            <a:solidFill>
-              <a:srgbClr val="8EDBD4"/>
-            </a:solidFill>
-          </a:ln>
-          <a:effectLst/>
-        </p:spPr>
-      </p:cxnSp>
-      <p:cxnSp>
-        <p:nvCxnSpPr>
-          <p:cNvPr id="68" name="C4-E16 line 66" descr="sci-ppt:o066"/>
-          <p:cNvCxnSpPr/>
-          <p:nvPr/>
-        </p:nvCxnSpPr>
-        <p:spPr>
-          <a:xfrm>
-            <a:off x="5907024" y="2243644"/>
-            <a:ext cx="76580" cy="59478"/>
-          </a:xfrm>
-          <a:prstGeom prst="line">
-            <a:avLst/>
-          </a:prstGeom>
-          <a:ln w="25400">
-            <a:solidFill>
-              <a:srgbClr val="8EDBD4"/>
-            </a:solidFill>
-          </a:ln>
-          <a:effectLst/>
-        </p:spPr>
-      </p:cxnSp>
-      <p:cxnSp>
-        <p:nvCxnSpPr>
-          <p:cNvPr id="69" name="C4-E16 line 67" descr="sci-ppt:o067"/>
-          <p:cNvCxnSpPr/>
-          <p:nvPr/>
-        </p:nvCxnSpPr>
-        <p:spPr>
-          <a:xfrm>
-            <a:off x="5983604" y="2303122"/>
-            <a:ext cx="76582" cy="58809"/>
-          </a:xfrm>
-          <a:prstGeom prst="line">
-            <a:avLst/>
-          </a:prstGeom>
-          <a:ln w="25400">
-            <a:solidFill>
-              <a:srgbClr val="8EDBD4"/>
-            </a:solidFill>
-          </a:ln>
-          <a:effectLst/>
-        </p:spPr>
-      </p:cxnSp>
-      <p:cxnSp>
-        <p:nvCxnSpPr>
-          <p:cNvPr id="70" name="C4-E16 line 68" descr="sci-ppt:o068"/>
-          <p:cNvCxnSpPr/>
-          <p:nvPr/>
-        </p:nvCxnSpPr>
-        <p:spPr>
-          <a:xfrm>
-            <a:off x="6060186" y="2361931"/>
-            <a:ext cx="76581" cy="57767"/>
-          </a:xfrm>
-          <a:prstGeom prst="line">
-            <a:avLst/>
-          </a:prstGeom>
-          <a:ln w="25400">
-            <a:solidFill>
-              <a:srgbClr val="8EDBD4"/>
-            </a:solidFill>
-          </a:ln>
-          <a:effectLst/>
-        </p:spPr>
-      </p:cxnSp>
-      <p:cxnSp>
-        <p:nvCxnSpPr>
-          <p:cNvPr id="71" name="C4-E16 line 69" descr="sci-ppt:o069"/>
-          <p:cNvCxnSpPr/>
-          <p:nvPr/>
-        </p:nvCxnSpPr>
-        <p:spPr>
-          <a:xfrm>
-            <a:off x="6136767" y="2419698"/>
-            <a:ext cx="76581" cy="56341"/>
-          </a:xfrm>
-          <a:prstGeom prst="line">
-            <a:avLst/>
-          </a:prstGeom>
-          <a:ln w="25400">
-            <a:solidFill>
-              <a:srgbClr val="8EDBD4"/>
-            </a:solidFill>
-          </a:ln>
-          <a:effectLst/>
-        </p:spPr>
-      </p:cxnSp>
-      <p:cxnSp>
-        <p:nvCxnSpPr>
-          <p:cNvPr id="72" name="C4-E16 line 70" descr="sci-ppt:o070"/>
-          <p:cNvCxnSpPr/>
-          <p:nvPr/>
-        </p:nvCxnSpPr>
-        <p:spPr>
-          <a:xfrm>
-            <a:off x="6213348" y="2476039"/>
-            <a:ext cx="76581" cy="54513"/>
-          </a:xfrm>
-          <a:prstGeom prst="line">
-            <a:avLst/>
-          </a:prstGeom>
-          <a:ln w="25400">
-            <a:solidFill>
-              <a:srgbClr val="8EDBD4"/>
-            </a:solidFill>
-          </a:ln>
-          <a:effectLst/>
-        </p:spPr>
-      </p:cxnSp>
-      <p:cxnSp>
-        <p:nvCxnSpPr>
-          <p:cNvPr id="73" name="C4-E16 line 71" descr="sci-ppt:o071"/>
-          <p:cNvCxnSpPr/>
-          <p:nvPr/>
-        </p:nvCxnSpPr>
-        <p:spPr>
-          <a:xfrm>
-            <a:off x="6289929" y="2530552"/>
-            <a:ext cx="76581" cy="52270"/>
-          </a:xfrm>
-          <a:prstGeom prst="line">
-            <a:avLst/>
-          </a:prstGeom>
-          <a:ln w="25400">
-            <a:solidFill>
-              <a:srgbClr val="8EDBD4"/>
-            </a:solidFill>
-          </a:ln>
-          <a:effectLst/>
-        </p:spPr>
-      </p:cxnSp>
-      <p:cxnSp>
-        <p:nvCxnSpPr>
-          <p:cNvPr id="74" name="C4-E16 line 72" descr="sci-ppt:o072"/>
-          <p:cNvCxnSpPr/>
-          <p:nvPr/>
-        </p:nvCxnSpPr>
-        <p:spPr>
-          <a:xfrm>
-            <a:off x="6366510" y="2582822"/>
-            <a:ext cx="76581" cy="49597"/>
-          </a:xfrm>
-          <a:prstGeom prst="line">
-            <a:avLst/>
-          </a:prstGeom>
-          <a:ln w="25400">
-            <a:solidFill>
-              <a:srgbClr val="8EDBD4"/>
-            </a:solidFill>
-          </a:ln>
-          <a:effectLst/>
-        </p:spPr>
-      </p:cxnSp>
-      <p:cxnSp>
-        <p:nvCxnSpPr>
-          <p:cNvPr id="75" name="C4-E16 line 73" descr="sci-ppt:o073"/>
-          <p:cNvCxnSpPr/>
-          <p:nvPr/>
-        </p:nvCxnSpPr>
-        <p:spPr>
-          <a:xfrm>
-            <a:off x="6443091" y="2632419"/>
-            <a:ext cx="76581" cy="46480"/>
-          </a:xfrm>
-          <a:prstGeom prst="line">
-            <a:avLst/>
-          </a:prstGeom>
-          <a:ln w="25400">
-            <a:solidFill>
-              <a:srgbClr val="8EDBD4"/>
-            </a:solidFill>
-          </a:ln>
-          <a:effectLst/>
-        </p:spPr>
-      </p:cxnSp>
-      <p:cxnSp>
-        <p:nvCxnSpPr>
-          <p:cNvPr id="76" name="C4-E16 line 74" descr="sci-ppt:o074"/>
-          <p:cNvCxnSpPr/>
-          <p:nvPr/>
-        </p:nvCxnSpPr>
-        <p:spPr>
-          <a:xfrm>
-            <a:off x="6519672" y="2678899"/>
-            <a:ext cx="76581" cy="42903"/>
-          </a:xfrm>
-          <a:prstGeom prst="line">
-            <a:avLst/>
-          </a:prstGeom>
-          <a:ln w="25400">
-            <a:solidFill>
-              <a:srgbClr val="8EDBD4"/>
-            </a:solidFill>
-          </a:ln>
-          <a:effectLst/>
-        </p:spPr>
-      </p:cxnSp>
-      <p:cxnSp>
-        <p:nvCxnSpPr>
-          <p:cNvPr id="77" name="C4-E16 line 75" descr="sci-ppt:o075"/>
-          <p:cNvCxnSpPr/>
-          <p:nvPr/>
-        </p:nvCxnSpPr>
-        <p:spPr>
-          <a:xfrm>
-            <a:off x="6596253" y="2721802"/>
-            <a:ext cx="76580" cy="38853"/>
-          </a:xfrm>
-          <a:prstGeom prst="line">
-            <a:avLst/>
-          </a:prstGeom>
-          <a:ln w="25400">
-            <a:solidFill>
-              <a:srgbClr val="8EDBD4"/>
-            </a:solidFill>
-          </a:ln>
-          <a:effectLst/>
-        </p:spPr>
-      </p:cxnSp>
-      <p:cxnSp>
-        <p:nvCxnSpPr>
-          <p:cNvPr id="78" name="C4-E16 line 76" descr="sci-ppt:o076"/>
-          <p:cNvCxnSpPr/>
-          <p:nvPr/>
-        </p:nvCxnSpPr>
-        <p:spPr>
-          <a:xfrm>
-            <a:off x="6672833" y="2760655"/>
-            <a:ext cx="76582" cy="34314"/>
-          </a:xfrm>
-          <a:prstGeom prst="line">
-            <a:avLst/>
-          </a:prstGeom>
-          <a:ln w="25400">
-            <a:solidFill>
-              <a:srgbClr val="8EDBD4"/>
-            </a:solidFill>
-          </a:ln>
-          <a:effectLst/>
-        </p:spPr>
-      </p:cxnSp>
-      <p:cxnSp>
-        <p:nvCxnSpPr>
-          <p:cNvPr id="79" name="C4-E16 line 77" descr="sci-ppt:o077"/>
-          <p:cNvCxnSpPr/>
-          <p:nvPr/>
-        </p:nvCxnSpPr>
-        <p:spPr>
-          <a:xfrm>
-            <a:off x="6749415" y="2794969"/>
-            <a:ext cx="76581" cy="29274"/>
-          </a:xfrm>
-          <a:prstGeom prst="line">
-            <a:avLst/>
-          </a:prstGeom>
-          <a:ln w="25400">
-            <a:solidFill>
-              <a:srgbClr val="8EDBD4"/>
-            </a:solidFill>
-          </a:ln>
-          <a:effectLst/>
-        </p:spPr>
-      </p:cxnSp>
-      <p:cxnSp>
-        <p:nvCxnSpPr>
-          <p:cNvPr id="80" name="C4-E16 line 78" descr="sci-ppt:o078"/>
-          <p:cNvCxnSpPr/>
-          <p:nvPr/>
-        </p:nvCxnSpPr>
-        <p:spPr>
-          <a:xfrm>
-            <a:off x="6825996" y="2824243"/>
-            <a:ext cx="76581" cy="23715"/>
-          </a:xfrm>
-          <a:prstGeom prst="line">
-            <a:avLst/>
-          </a:prstGeom>
-          <a:ln w="25400">
-            <a:solidFill>
-              <a:srgbClr val="8EDBD4"/>
-            </a:solidFill>
-          </a:ln>
-          <a:effectLst/>
-        </p:spPr>
-      </p:cxnSp>
-      <p:cxnSp>
-        <p:nvCxnSpPr>
-          <p:cNvPr id="81" name="C4-E16 line 79" descr="sci-ppt:o079"/>
-          <p:cNvCxnSpPr/>
-          <p:nvPr/>
-        </p:nvCxnSpPr>
-        <p:spPr>
-          <a:xfrm>
-            <a:off x="6902577" y="2847958"/>
-            <a:ext cx="76581" cy="17624"/>
-          </a:xfrm>
-          <a:prstGeom prst="line">
-            <a:avLst/>
-          </a:prstGeom>
-          <a:ln w="25400">
-            <a:solidFill>
-              <a:srgbClr val="8EDBD4"/>
-            </a:solidFill>
-          </a:ln>
-          <a:effectLst/>
-        </p:spPr>
-      </p:cxnSp>
-      <p:cxnSp>
-        <p:nvCxnSpPr>
-          <p:cNvPr id="82" name="C4-E16 line 80" descr="sci-ppt:o080"/>
-          <p:cNvCxnSpPr/>
-          <p:nvPr/>
-        </p:nvCxnSpPr>
-        <p:spPr>
-          <a:xfrm>
-            <a:off x="6979158" y="2865582"/>
-            <a:ext cx="76581" cy="10988"/>
-          </a:xfrm>
-          <a:prstGeom prst="line">
-            <a:avLst/>
-          </a:prstGeom>
-          <a:ln w="25400">
-            <a:solidFill>
-              <a:srgbClr val="8EDBD4"/>
-            </a:solidFill>
-          </a:ln>
-          <a:effectLst/>
-        </p:spPr>
-      </p:cxnSp>
-      <p:cxnSp>
-        <p:nvCxnSpPr>
-          <p:cNvPr id="83" name="C4-E16 line 81" descr="sci-ppt:o081"/>
-          <p:cNvCxnSpPr/>
-          <p:nvPr/>
-        </p:nvCxnSpPr>
-        <p:spPr>
-          <a:xfrm>
-            <a:off x="7055739" y="2876570"/>
-            <a:ext cx="76581" cy="3790"/>
-          </a:xfrm>
-          <a:prstGeom prst="line">
-            <a:avLst/>
-          </a:prstGeom>
-          <a:ln w="25400">
-            <a:solidFill>
-              <a:srgbClr val="8EDBD4"/>
-            </a:solidFill>
-          </a:ln>
-          <a:effectLst/>
-        </p:spPr>
-      </p:cxnSp>
-      <p:sp>
-        <p:nvSpPr>
-          <p:cNvPr id="84" name="C4-E16 rect 82" descr="sci-ppt:o082"/>
-          <p:cNvSpPr/>
-          <p:nvPr/>
-        </p:nvSpPr>
-        <p:spPr>
-          <a:xfrm>
-            <a:off x="777240" y="2651760"/>
-            <a:ext cx="274320" cy="457200"/>
-          </a:xfrm>
-          <a:prstGeom prst="rect">
-            <a:avLst/>
-          </a:prstGeom>
-          <a:solidFill>
-            <a:srgbClr val="213E4B"/>
-          </a:solidFill>
-          <a:ln w="19050">
-            <a:solidFill>
-              <a:srgbClr val="B4C7D2"/>
-            </a:solidFill>
-          </a:ln>
-          <a:effectLst/>
-        </p:spPr>
         <p:txBody>
           <a:bodyPr rtlCol="0" anchor="ctr"/>
           <a:lstStyle/>
@@ -4952,70 +4686,14 @@
       </p:sp>
       <p:sp>
         <p:nvSpPr>
-          <p:cNvPr id="85" name="C4-E16 rect 83" descr="sci-ppt:o083"/>
-          <p:cNvSpPr/>
-          <p:nvPr/>
-        </p:nvSpPr>
-        <p:spPr>
-          <a:xfrm>
-            <a:off x="7086600" y="2651760"/>
-            <a:ext cx="274320" cy="457200"/>
-          </a:xfrm>
-          <a:prstGeom prst="rect">
-            <a:avLst/>
-          </a:prstGeom>
-          <a:solidFill>
-            <a:srgbClr val="213E4B"/>
-          </a:solidFill>
-          <a:ln w="19050">
-            <a:solidFill>
-              <a:srgbClr val="B4C7D2"/>
-            </a:solidFill>
-          </a:ln>
-          <a:effectLst/>
-        </p:spPr>
-        <p:txBody>
-          <a:bodyPr rtlCol="0" anchor="ctr"/>
-          <a:lstStyle/>
-          <a:p>
-            <a:pPr algn="ctr"/>
-          </a:p>
-        </p:txBody>
-      </p:sp>
-      <p:cxnSp>
-        <p:nvCxnSpPr>
-          <p:cNvPr id="86" name="C4-E16 arrow 84" descr="sci-ppt:o084"/>
-          <p:cNvCxnSpPr/>
-          <p:nvPr/>
-        </p:nvCxnSpPr>
-        <p:spPr>
-          <a:xfrm flipV="1">
-            <a:off x="4069080" y="1371600"/>
-            <a:ext cx="0" cy="1463040"/>
-          </a:xfrm>
-          <a:prstGeom prst="line">
-            <a:avLst/>
-          </a:prstGeom>
-          <a:ln w="25400">
-            <a:solidFill>
-              <a:srgbClr val="8EDBD4"/>
-            </a:solidFill>
-            <a:headEnd type="none" w="med" len="med"/>
-            <a:tailEnd type="triangle" w="med" len="med"/>
-          </a:ln>
-          <a:effectLst/>
-        </p:spPr>
-      </p:cxnSp>
-      <p:sp>
-        <p:nvSpPr>
-          <p:cNvPr id="87" name="C4-E16 text 85" descr="sci-ppt:o085"/>
+          <p:cNvPr id="35" name="C4-E16 text 33" descr="sci-ppt:o033"/>
           <p:cNvSpPr txBox="1"/>
           <p:nvPr/>
         </p:nvSpPr>
         <p:spPr>
           <a:xfrm>
-            <a:off x="4206240" y="1920240"/>
-            <a:ext cx="2560320" cy="411480"/>
+            <a:off x="6967728" y="1426464"/>
+            <a:ext cx="4764024" cy="254889"/>
           </a:xfrm>
           <a:prstGeom prst="rect">
             <a:avLst/>
@@ -5024,7 +4702,7 @@
           <a:effectLst/>
         </p:spPr>
         <p:txBody>
-          <a:bodyPr wrap="square" lIns="27432" rIns="27432" tIns="18288" bIns="18288" anchor="ctr">
+          <a:bodyPr wrap="none" lIns="18288" rIns="18288" tIns="18288" bIns="18288" anchor="t">
             <a:spAutoFit/>
           </a:bodyPr>
           <a:lstStyle/>
@@ -5035,99 +4713,67 @@
               </a:spcAft>
             </a:pPr>
             <a:r>
-              <a:rPr sz="1800" b="0" i="0">
+              <a:rPr sz="1350" b="1" i="0">
+                <a:solidFill>
+                  <a:srgbClr val="8EDBD4"/>
+                </a:solidFill>
+                <a:latin typeface="Arial"/>
+              </a:rPr>
+              <a:t>Fixing C₂ and C₄</a:t>
+            </a:r>
+          </a:p>
+        </p:txBody>
+      </p:sp>
+      <p:sp>
+        <p:nvSpPr>
+          <p:cNvPr id="36" name="C4-E16 text 34" descr="sci-ppt:o034"/>
+          <p:cNvSpPr txBox="1"/>
+          <p:nvPr/>
+        </p:nvSpPr>
+        <p:spPr>
+          <a:xfrm>
+            <a:off x="6995160" y="1828800"/>
+            <a:ext cx="4754880" cy="239395"/>
+          </a:xfrm>
+          <a:prstGeom prst="rect">
+            <a:avLst/>
+          </a:prstGeom>
+          <a:noFill/>
+          <a:effectLst/>
+        </p:spPr>
+        <p:txBody>
+          <a:bodyPr wrap="none" lIns="18288" rIns="18288" tIns="18288" bIns="18288" anchor="t">
+            <a:spAutoFit/>
+          </a:bodyPr>
+          <a:lstStyle/>
+          <a:p>
+            <a:pPr algn="l">
+              <a:spcAft>
+                <a:spcPts val="0"/>
+              </a:spcAft>
+            </a:pPr>
+            <a:r>
+              <a:rPr sz="1250" b="1" i="0">
                 <a:solidFill>
                   <a:srgbClr val="E7F0F3"/>
                 </a:solidFill>
                 <a:latin typeface="Arial"/>
               </a:rPr>
-              <a:t>w(r) ↑</a:t>
-            </a:r>
-          </a:p>
-        </p:txBody>
-      </p:sp>
-      <p:cxnSp>
-        <p:nvCxnSpPr>
-          <p:cNvPr id="88" name="C4-E16 arrow 86" descr="sci-ppt:o086"/>
-          <p:cNvCxnSpPr/>
-          <p:nvPr/>
-        </p:nvCxnSpPr>
-        <p:spPr>
-          <a:xfrm flipV="1">
-            <a:off x="2286000" y="2971800"/>
-            <a:ext cx="0" cy="594360"/>
-          </a:xfrm>
-          <a:prstGeom prst="line">
-            <a:avLst/>
-          </a:prstGeom>
-          <a:ln w="25400">
-            <a:solidFill>
-              <a:srgbClr val="8EDBD4"/>
-            </a:solidFill>
-            <a:headEnd type="none" w="med" len="med"/>
-            <a:tailEnd type="triangle" w="med" len="med"/>
-          </a:ln>
-          <a:effectLst/>
-        </p:spPr>
-      </p:cxnSp>
-      <p:cxnSp>
-        <p:nvCxnSpPr>
-          <p:cNvPr id="89" name="C4-E16 arrow 87" descr="sci-ppt:o087"/>
-          <p:cNvCxnSpPr/>
-          <p:nvPr/>
-        </p:nvCxnSpPr>
-        <p:spPr>
-          <a:xfrm flipV="1">
-            <a:off x="4069080" y="2971800"/>
-            <a:ext cx="0" cy="594360"/>
-          </a:xfrm>
-          <a:prstGeom prst="line">
-            <a:avLst/>
-          </a:prstGeom>
-          <a:ln w="25400">
-            <a:solidFill>
-              <a:srgbClr val="8EDBD4"/>
-            </a:solidFill>
-            <a:headEnd type="none" w="med" len="med"/>
-            <a:tailEnd type="triangle" w="med" len="med"/>
-          </a:ln>
-          <a:effectLst/>
-        </p:spPr>
-      </p:cxnSp>
-      <p:cxnSp>
-        <p:nvCxnSpPr>
-          <p:cNvPr id="90" name="C4-E16 arrow 88" descr="sci-ppt:o088"/>
-          <p:cNvCxnSpPr/>
-          <p:nvPr/>
-        </p:nvCxnSpPr>
-        <p:spPr>
-          <a:xfrm flipV="1">
-            <a:off x="5852160" y="2971800"/>
-            <a:ext cx="0" cy="594360"/>
-          </a:xfrm>
-          <a:prstGeom prst="line">
-            <a:avLst/>
-          </a:prstGeom>
-          <a:ln w="25400">
-            <a:solidFill>
-              <a:srgbClr val="8EDBD4"/>
-            </a:solidFill>
-            <a:headEnd type="none" w="med" len="med"/>
-            <a:tailEnd type="triangle" w="med" len="med"/>
-          </a:ln>
-          <a:effectLst/>
-        </p:spPr>
-      </p:cxnSp>
-      <p:sp>
-        <p:nvSpPr>
-          <p:cNvPr id="91" name="C4-E16 text 89" descr="sci-ppt:o089"/>
+              <a:t>w′(b) = 0:  C₂ = −p₀b² / (8D_f)</a:t>
+            </a:r>
+          </a:p>
+        </p:txBody>
+      </p:sp>
+      <p:sp>
+        <p:nvSpPr>
+          <p:cNvPr id="37" name="C4-E16 text 35" descr="sci-ppt:o035"/>
           <p:cNvSpPr txBox="1"/>
           <p:nvPr/>
         </p:nvSpPr>
         <p:spPr>
           <a:xfrm>
-            <a:off x="2834640" y="3611880"/>
-            <a:ext cx="3657600" cy="274320"/>
+            <a:off x="6995160" y="2377440"/>
+            <a:ext cx="4754880" cy="239395"/>
           </a:xfrm>
           <a:prstGeom prst="rect">
             <a:avLst/>
@@ -5136,7 +4782,7 @@
           <a:effectLst/>
         </p:spPr>
         <p:txBody>
-          <a:bodyPr wrap="square" lIns="27432" rIns="27432" tIns="18288" bIns="18288" anchor="ctr">
+          <a:bodyPr wrap="none" lIns="18288" rIns="18288" tIns="18288" bIns="18288" anchor="t">
             <a:spAutoFit/>
           </a:bodyPr>
           <a:lstStyle/>
@@ -5147,49 +4793,27 @@
               </a:spcAft>
             </a:pPr>
             <a:r>
-              <a:rPr sz="1600" b="0" i="0">
+              <a:rPr sz="1250" b="1" i="0">
                 <a:solidFill>
                   <a:srgbClr val="E7F0F3"/>
                 </a:solidFill>
                 <a:latin typeface="Arial"/>
               </a:rPr>
-              <a:t>p₀: maintained pressure</a:t>
-            </a:r>
-          </a:p>
-        </p:txBody>
-      </p:sp>
-      <p:cxnSp>
-        <p:nvCxnSpPr>
-          <p:cNvPr id="92" name="C4-E16 line 90" descr="sci-ppt:o090"/>
-          <p:cNvCxnSpPr/>
-          <p:nvPr/>
-        </p:nvCxnSpPr>
-        <p:spPr>
-          <a:xfrm>
-            <a:off x="4069080" y="3200400"/>
-            <a:ext cx="3063240" cy="0"/>
-          </a:xfrm>
-          <a:prstGeom prst="line">
-            <a:avLst/>
-          </a:prstGeom>
-          <a:ln w="25400">
-            <a:solidFill>
-              <a:srgbClr val="8EDBD4"/>
-            </a:solidFill>
-          </a:ln>
-          <a:effectLst/>
-        </p:spPr>
-      </p:cxnSp>
-      <p:sp>
-        <p:nvSpPr>
-          <p:cNvPr id="93" name="C4-E16 text 91" descr="sci-ppt:o091"/>
+              <a:t>w(b) = 0:  C₄ = p₀b⁴ / (64D_f)</a:t>
+            </a:r>
+          </a:p>
+        </p:txBody>
+      </p:sp>
+      <p:sp>
+        <p:nvSpPr>
+          <p:cNvPr id="38" name="C4-E16 text 36" descr="sci-ppt:o036"/>
           <p:cNvSpPr txBox="1"/>
           <p:nvPr/>
         </p:nvSpPr>
         <p:spPr>
           <a:xfrm>
-            <a:off x="5486400" y="3246120"/>
-            <a:ext cx="914400" cy="274320"/>
+            <a:off x="6995160" y="3063240"/>
+            <a:ext cx="4754880" cy="278130"/>
           </a:xfrm>
           <a:prstGeom prst="rect">
             <a:avLst/>
@@ -5198,7 +4822,7 @@
           <a:effectLst/>
         </p:spPr>
         <p:txBody>
-          <a:bodyPr wrap="square" lIns="27432" rIns="27432" tIns="18288" bIns="18288" anchor="ctr">
+          <a:bodyPr wrap="none" lIns="18288" rIns="18288" tIns="18288" bIns="18288" anchor="t">
             <a:spAutoFit/>
           </a:bodyPr>
           <a:lstStyle/>
@@ -5209,81 +4833,123 @@
               </a:spcAft>
             </a:pPr>
             <a:r>
-              <a:rPr sz="1600" b="0" i="0">
+              <a:rPr sz="1500" b="1" i="0">
+                <a:solidFill>
+                  <a:srgbClr val="F2B880"/>
+                </a:solidFill>
+                <a:latin typeface="Arial"/>
+              </a:rPr>
+              <a:t>w(r) = p₀ (b² − r²)² / (64D_f)</a:t>
+            </a:r>
+          </a:p>
+        </p:txBody>
+      </p:sp>
+      <p:sp>
+        <p:nvSpPr>
+          <p:cNvPr id="39" name="C4-E16 text 37" descr="sci-ppt:o037"/>
+          <p:cNvSpPr txBox="1"/>
+          <p:nvPr/>
+        </p:nvSpPr>
+        <p:spPr>
+          <a:xfrm>
+            <a:off x="6995160" y="3749039"/>
+            <a:ext cx="4754880" cy="417576"/>
+          </a:xfrm>
+          <a:prstGeom prst="rect">
+            <a:avLst/>
+          </a:prstGeom>
+          <a:noFill/>
+          <a:effectLst/>
+        </p:spPr>
+        <p:txBody>
+          <a:bodyPr wrap="none" lIns="18288" rIns="18288" tIns="18288" bIns="18288" anchor="t">
+            <a:spAutoFit/>
+          </a:bodyPr>
+          <a:lstStyle/>
+          <a:p>
+            <a:pPr algn="l">
+              <a:spcAft>
+                <a:spcPts val="0"/>
+              </a:spcAft>
+            </a:pPr>
+            <a:r>
+              <a:rPr sz="1200" b="0" i="0">
+                <a:solidFill>
+                  <a:srgbClr val="B4C7D2"/>
+                </a:solidFill>
+                <a:latin typeface="Arial"/>
+              </a:rPr>
+              <a:t>Unique regular solution; the profile is a squared</a:t>
+            </a:r>
+          </a:p>
+          <a:p>
+            <a:pPr algn="l">
+              <a:spcAft>
+                <a:spcPts val="0"/>
+              </a:spcAft>
+            </a:pPr>
+            <a:r>
+              <a:rPr sz="1200" b="0" i="0">
+                <a:solidFill>
+                  <a:srgbClr val="B4C7D2"/>
+                </a:solidFill>
+                <a:latin typeface="Arial"/>
+              </a:rPr>
+              <a:t>parabola.</a:t>
+            </a:r>
+          </a:p>
+        </p:txBody>
+      </p:sp>
+      <p:sp>
+        <p:nvSpPr>
+          <p:cNvPr id="40" name="C4-E16 text 38" descr="sci-ppt:o038"/>
+          <p:cNvSpPr txBox="1"/>
+          <p:nvPr/>
+        </p:nvSpPr>
+        <p:spPr>
+          <a:xfrm>
+            <a:off x="914400" y="5486400"/>
+            <a:ext cx="10972800" cy="239395"/>
+          </a:xfrm>
+          <a:prstGeom prst="rect">
+            <a:avLst/>
+          </a:prstGeom>
+          <a:noFill/>
+          <a:effectLst/>
+        </p:spPr>
+        <p:txBody>
+          <a:bodyPr wrap="none" lIns="18288" rIns="18288" tIns="18288" bIns="18288" anchor="t">
+            <a:spAutoFit/>
+          </a:bodyPr>
+          <a:lstStyle/>
+          <a:p>
+            <a:pPr algn="l">
+              <a:spcAft>
+                <a:spcPts val="0"/>
+              </a:spcAft>
+            </a:pPr>
+            <a:r>
+              <a:rPr sz="1250" b="0" i="0">
                 <a:solidFill>
                   <a:srgbClr val="E7F0F3"/>
                 </a:solidFill>
                 <a:latin typeface="Arial"/>
               </a:rPr>
-              <a:t>b</a:t>
-            </a:r>
-          </a:p>
-        </p:txBody>
-      </p:sp>
-      <p:sp>
-        <p:nvSpPr>
-          <p:cNvPr id="94" name="C4-E16 ellipse 92" descr="sci-ppt:o092"/>
-          <p:cNvSpPr/>
-          <p:nvPr/>
-        </p:nvSpPr>
-        <p:spPr>
-          <a:xfrm>
-            <a:off x="8686800" y="1097280"/>
-            <a:ext cx="1920240" cy="1920240"/>
-          </a:xfrm>
-          <a:prstGeom prst="ellipse">
-            <a:avLst/>
-          </a:prstGeom>
-          <a:noFill/>
-          <a:ln w="19050">
-            <a:solidFill>
-              <a:srgbClr val="B4C7D2"/>
-            </a:solidFill>
-          </a:ln>
-          <a:effectLst/>
-        </p:spPr>
-        <p:txBody>
-          <a:bodyPr rtlCol="0" anchor="ctr"/>
-          <a:lstStyle/>
-          <a:p>
-            <a:pPr algn="ctr"/>
-          </a:p>
-        </p:txBody>
-      </p:sp>
-      <p:cxnSp>
-        <p:nvCxnSpPr>
-          <p:cNvPr id="95" name="C4-E16 arrow 93" descr="sci-ppt:o093"/>
-          <p:cNvCxnSpPr/>
-          <p:nvPr/>
-        </p:nvCxnSpPr>
-        <p:spPr>
-          <a:xfrm>
-            <a:off x="9646920" y="2057400"/>
-            <a:ext cx="960120" cy="0"/>
-          </a:xfrm>
-          <a:prstGeom prst="line">
-            <a:avLst/>
-          </a:prstGeom>
-          <a:ln w="25400">
-            <a:solidFill>
-              <a:srgbClr val="8EDBD4"/>
-            </a:solidFill>
-            <a:headEnd type="none" w="med" len="med"/>
-            <a:tailEnd type="triangle" w="med" len="med"/>
-          </a:ln>
-          <a:effectLst/>
-        </p:spPr>
-      </p:cxnSp>
-      <p:sp>
-        <p:nvSpPr>
-          <p:cNvPr id="96" name="C4-E16 text 94" descr="sci-ppt:o094"/>
+              <a:t>Both edge conditions are satisfied exactly; there is no free constant left.</a:t>
+            </a:r>
+          </a:p>
+        </p:txBody>
+      </p:sp>
+      <p:sp>
+        <p:nvSpPr>
+          <p:cNvPr id="41" name="C4-E16 text 39" descr="sci-ppt:o039"/>
           <p:cNvSpPr txBox="1"/>
           <p:nvPr/>
         </p:nvSpPr>
         <p:spPr>
           <a:xfrm>
-            <a:off x="9875520" y="1645920"/>
-            <a:ext cx="914400" cy="274320"/>
+            <a:off x="320040" y="6510528"/>
+            <a:ext cx="11521440" cy="200660"/>
           </a:xfrm>
           <a:prstGeom prst="rect">
             <a:avLst/>
@@ -5292,429 +4958,7 @@
           <a:effectLst/>
         </p:spPr>
         <p:txBody>
-          <a:bodyPr wrap="square" lIns="27432" rIns="27432" tIns="18288" bIns="18288" anchor="ctr">
-            <a:spAutoFit/>
-          </a:bodyPr>
-          <a:lstStyle/>
-          <a:p>
-            <a:pPr algn="l">
-              <a:spcAft>
-                <a:spcPts val="0"/>
-              </a:spcAft>
-            </a:pPr>
-            <a:r>
-              <a:rPr sz="1700" b="0" i="0">
-                <a:solidFill>
-                  <a:srgbClr val="E7F0F3"/>
-                </a:solidFill>
-                <a:latin typeface="Arial"/>
-              </a:rPr>
-              <a:t>b</a:t>
-            </a:r>
-          </a:p>
-        </p:txBody>
-      </p:sp>
-      <p:sp>
-        <p:nvSpPr>
-          <p:cNvPr id="97" name="C4-E16 text 95" descr="sci-ppt:o095"/>
-          <p:cNvSpPr txBox="1"/>
-          <p:nvPr/>
-        </p:nvSpPr>
-        <p:spPr>
-          <a:xfrm>
-            <a:off x="8503920" y="3291840"/>
-            <a:ext cx="2743200" cy="365760"/>
-          </a:xfrm>
-          <a:prstGeom prst="rect">
-            <a:avLst/>
-          </a:prstGeom>
-          <a:noFill/>
-          <a:effectLst/>
-        </p:spPr>
-        <p:txBody>
-          <a:bodyPr wrap="square" lIns="27432" rIns="27432" tIns="18288" bIns="18288" anchor="ctr">
-            <a:spAutoFit/>
-          </a:bodyPr>
-          <a:lstStyle/>
-          <a:p>
-            <a:pPr algn="l">
-              <a:spcAft>
-                <a:spcPts val="0"/>
-              </a:spcAft>
-            </a:pPr>
-            <a:r>
-              <a:rPr sz="1800" b="0" i="0">
-                <a:solidFill>
-                  <a:srgbClr val="E7F0F3"/>
-                </a:solidFill>
-                <a:latin typeface="Arial"/>
-              </a:rPr>
-              <a:t>A_c = π b²</a:t>
-            </a:r>
-          </a:p>
-        </p:txBody>
-      </p:sp>
-      <p:sp>
-        <p:nvSpPr>
-          <p:cNvPr id="98" name="C4-E16 text 96" descr="sci-ppt:o096"/>
-          <p:cNvSpPr txBox="1"/>
-          <p:nvPr/>
-        </p:nvSpPr>
-        <p:spPr>
-          <a:xfrm>
-            <a:off x="685800" y="731520"/>
-            <a:ext cx="10972800" cy="365760"/>
-          </a:xfrm>
-          <a:prstGeom prst="rect">
-            <a:avLst/>
-          </a:prstGeom>
-          <a:noFill/>
-          <a:effectLst/>
-        </p:spPr>
-        <p:txBody>
-          <a:bodyPr wrap="square" lIns="27432" rIns="27432" tIns="18288" bIns="18288" anchor="ctr">
-            <a:spAutoFit/>
-          </a:bodyPr>
-          <a:lstStyle/>
-          <a:p>
-            <a:pPr algn="l">
-              <a:spcAft>
-                <a:spcPts val="0"/>
-              </a:spcAft>
-            </a:pPr>
-            <a:r>
-              <a:rPr sz="1800" b="0" i="0">
-                <a:solidFill>
-                  <a:srgbClr val="8EDBD4"/>
-                </a:solidFill>
-                <a:latin typeface="Arial"/>
-              </a:rPr>
-              <a:t>Clamped circular blister: w(b) = 0; w′(b) = 0; regular centre.</a:t>
-            </a:r>
-          </a:p>
-        </p:txBody>
-      </p:sp>
-      <p:cxnSp>
-        <p:nvCxnSpPr>
-          <p:cNvPr id="99" name="C4-E16 line 97" descr="sci-ppt:o097"/>
-          <p:cNvCxnSpPr/>
-          <p:nvPr/>
-        </p:nvCxnSpPr>
-        <p:spPr>
-          <a:xfrm>
-            <a:off x="274320" y="3977639"/>
-            <a:ext cx="11612880" cy="0"/>
-          </a:xfrm>
-          <a:prstGeom prst="line">
-            <a:avLst/>
-          </a:prstGeom>
-          <a:ln w="12700">
-            <a:solidFill>
-              <a:srgbClr val="405967"/>
-            </a:solidFill>
-          </a:ln>
-          <a:effectLst/>
-        </p:spPr>
-      </p:cxnSp>
-      <p:sp>
-        <p:nvSpPr>
-          <p:cNvPr id="100" name="C4-E16 text 98" descr="sci-ppt:o098"/>
-          <p:cNvSpPr txBox="1"/>
-          <p:nvPr/>
-        </p:nvSpPr>
-        <p:spPr>
-          <a:xfrm>
-            <a:off x="320040" y="4096512"/>
-            <a:ext cx="5715000" cy="246888"/>
-          </a:xfrm>
-          <a:prstGeom prst="rect">
-            <a:avLst/>
-          </a:prstGeom>
-          <a:noFill/>
-          <a:effectLst/>
-        </p:spPr>
-        <p:txBody>
-          <a:bodyPr wrap="square" lIns="27432" rIns="27432" tIns="18288" bIns="18288" anchor="ctr">
-            <a:spAutoFit/>
-          </a:bodyPr>
-          <a:lstStyle/>
-          <a:p>
-            <a:pPr algn="l">
-              <a:spcAft>
-                <a:spcPts val="0"/>
-              </a:spcAft>
-            </a:pPr>
-            <a:r>
-              <a:rPr sz="1150" b="0" i="0">
-                <a:solidFill>
-                  <a:srgbClr val="B4C7D2"/>
-                </a:solidFill>
-                <a:latin typeface="Arial"/>
-              </a:rPr>
-              <a:t>• r = 0 → w_max</a:t>
-            </a:r>
-          </a:p>
-        </p:txBody>
-      </p:sp>
-      <p:sp>
-        <p:nvSpPr>
-          <p:cNvPr id="101" name="C4-E16 text 99" descr="sci-ppt:o099"/>
-          <p:cNvSpPr txBox="1"/>
-          <p:nvPr/>
-        </p:nvSpPr>
-        <p:spPr>
-          <a:xfrm>
-            <a:off x="6217920" y="4096512"/>
-            <a:ext cx="5715000" cy="246888"/>
-          </a:xfrm>
-          <a:prstGeom prst="rect">
-            <a:avLst/>
-          </a:prstGeom>
-          <a:noFill/>
-          <a:effectLst/>
-        </p:spPr>
-        <p:txBody>
-          <a:bodyPr wrap="square" lIns="27432" rIns="27432" tIns="18288" bIns="18288" anchor="ctr">
-            <a:spAutoFit/>
-          </a:bodyPr>
-          <a:lstStyle/>
-          <a:p>
-            <a:pPr algn="l">
-              <a:spcAft>
-                <a:spcPts val="0"/>
-              </a:spcAft>
-            </a:pPr>
-            <a:r>
-              <a:rPr sz="1150" b="0" i="0">
-                <a:solidFill>
-                  <a:srgbClr val="B4C7D2"/>
-                </a:solidFill>
-                <a:latin typeface="Arial"/>
-              </a:rPr>
-              <a:t>• r = b → w = 0, slope = 0</a:t>
-            </a:r>
-          </a:p>
-        </p:txBody>
-      </p:sp>
-      <p:sp>
-        <p:nvSpPr>
-          <p:cNvPr id="102" name="C4-E16 text 100" descr="sci-ppt:o100"/>
-          <p:cNvSpPr txBox="1"/>
-          <p:nvPr/>
-        </p:nvSpPr>
-        <p:spPr>
-          <a:xfrm>
-            <a:off x="320040" y="4329684"/>
-            <a:ext cx="5715000" cy="246888"/>
-          </a:xfrm>
-          <a:prstGeom prst="rect">
-            <a:avLst/>
-          </a:prstGeom>
-          <a:noFill/>
-          <a:effectLst/>
-        </p:spPr>
-        <p:txBody>
-          <a:bodyPr wrap="square" lIns="27432" rIns="27432" tIns="18288" bIns="18288" anchor="ctr">
-            <a:spAutoFit/>
-          </a:bodyPr>
-          <a:lstStyle/>
-          <a:p>
-            <a:pPr algn="l">
-              <a:spcAft>
-                <a:spcPts val="0"/>
-              </a:spcAft>
-            </a:pPr>
-            <a:r>
-              <a:rPr sz="1150" b="0" i="0">
-                <a:solidFill>
-                  <a:srgbClr val="B4C7D2"/>
-                </a:solidFill>
-                <a:latin typeface="Arial"/>
-              </a:rPr>
-              <a:t>• p₀ ↑ held pressure</a:t>
-            </a:r>
-          </a:p>
-        </p:txBody>
-      </p:sp>
-      <p:sp>
-        <p:nvSpPr>
-          <p:cNvPr id="103" name="C4-E16 text 101" descr="sci-ppt:o101"/>
-          <p:cNvSpPr txBox="1"/>
-          <p:nvPr/>
-        </p:nvSpPr>
-        <p:spPr>
-          <a:xfrm>
-            <a:off x="6217920" y="4329684"/>
-            <a:ext cx="5715000" cy="246888"/>
-          </a:xfrm>
-          <a:prstGeom prst="rect">
-            <a:avLst/>
-          </a:prstGeom>
-          <a:noFill/>
-          <a:effectLst/>
-        </p:spPr>
-        <p:txBody>
-          <a:bodyPr wrap="square" lIns="27432" rIns="27432" tIns="18288" bIns="18288" anchor="ctr">
-            <a:spAutoFit/>
-          </a:bodyPr>
-          <a:lstStyle/>
-          <a:p>
-            <a:pPr algn="l">
-              <a:spcAft>
-                <a:spcPts val="0"/>
-              </a:spcAft>
-            </a:pPr>
-            <a:r>
-              <a:rPr sz="1150" b="0" i="0">
-                <a:solidFill>
-                  <a:srgbClr val="B4C7D2"/>
-                </a:solidFill>
-                <a:latin typeface="Arial"/>
-              </a:rPr>
-              <a:t>• D_f — bending resistance</a:t>
-            </a:r>
-          </a:p>
-        </p:txBody>
-      </p:sp>
-      <p:sp>
-        <p:nvSpPr>
-          <p:cNvPr id="104" name="C4-E16 text 102" descr="sci-ppt:o102"/>
-          <p:cNvSpPr txBox="1"/>
-          <p:nvPr/>
-        </p:nvSpPr>
-        <p:spPr>
-          <a:xfrm>
-            <a:off x="320040" y="4562856"/>
-            <a:ext cx="5715000" cy="246888"/>
-          </a:xfrm>
-          <a:prstGeom prst="rect">
-            <a:avLst/>
-          </a:prstGeom>
-          <a:noFill/>
-          <a:effectLst/>
-        </p:spPr>
-        <p:txBody>
-          <a:bodyPr wrap="square" lIns="27432" rIns="27432" tIns="18288" bIns="18288" anchor="ctr">
-            <a:spAutoFit/>
-          </a:bodyPr>
-          <a:lstStyle/>
-          <a:p>
-            <a:pPr algn="l">
-              <a:spcAft>
-                <a:spcPts val="0"/>
-              </a:spcAft>
-            </a:pPr>
-            <a:r>
-              <a:rPr sz="1150" b="0" i="0">
-                <a:solidFill>
-                  <a:srgbClr val="B4C7D2"/>
-                </a:solidFill>
-                <a:latin typeface="Arial"/>
-              </a:rPr>
-              <a:t>• C₂, C₄ — boundary-fixed constants</a:t>
-            </a:r>
-          </a:p>
-        </p:txBody>
-      </p:sp>
-      <p:sp>
-        <p:nvSpPr>
-          <p:cNvPr id="105" name="C4-E16 text 103" descr="sci-ppt:o103"/>
-          <p:cNvSpPr txBox="1"/>
-          <p:nvPr/>
-        </p:nvSpPr>
-        <p:spPr>
-          <a:xfrm>
-            <a:off x="6217920" y="4562856"/>
-            <a:ext cx="5715000" cy="246888"/>
-          </a:xfrm>
-          <a:prstGeom prst="rect">
-            <a:avLst/>
-          </a:prstGeom>
-          <a:noFill/>
-          <a:effectLst/>
-        </p:spPr>
-        <p:txBody>
-          <a:bodyPr wrap="square" lIns="27432" rIns="27432" tIns="18288" bIns="18288" anchor="ctr">
-            <a:spAutoFit/>
-          </a:bodyPr>
-          <a:lstStyle/>
-          <a:p>
-            <a:pPr algn="l">
-              <a:spcAft>
-                <a:spcPts val="0"/>
-              </a:spcAft>
-            </a:pPr>
-            <a:r>
-              <a:rPr sz="1150" b="0" i="0">
-                <a:solidFill>
-                  <a:srgbClr val="B4C7D2"/>
-                </a:solidFill>
-                <a:latin typeface="Arial"/>
-              </a:rPr>
-              <a:t>• w(r) — quartic profile</a:t>
-            </a:r>
-          </a:p>
-        </p:txBody>
-      </p:sp>
-      <p:sp>
-        <p:nvSpPr>
-          <p:cNvPr id="106" name="C4-E16 text 104" descr="sci-ppt:o104"/>
-          <p:cNvSpPr txBox="1"/>
-          <p:nvPr/>
-        </p:nvSpPr>
-        <p:spPr>
-          <a:xfrm>
-            <a:off x="320040" y="5596128"/>
-            <a:ext cx="11430000" cy="292608"/>
-          </a:xfrm>
-          <a:prstGeom prst="rect">
-            <a:avLst/>
-          </a:prstGeom>
-          <a:noFill/>
-          <a:effectLst/>
-        </p:spPr>
-        <p:txBody>
-          <a:bodyPr wrap="square" lIns="27432" rIns="27432" tIns="18288" bIns="18288" anchor="ctr">
-            <a:spAutoFit/>
-          </a:bodyPr>
-          <a:lstStyle/>
-          <a:p>
-            <a:pPr algn="l">
-              <a:spcAft>
-                <a:spcPts val="0"/>
-              </a:spcAft>
-            </a:pPr>
-            <a:r>
-              <a:rPr sz="1150" b="0" i="0">
-                <a:solidFill>
-                  <a:srgbClr val="8EDBD4"/>
-                </a:solidFill>
-                <a:latin typeface="Arial"/>
-              </a:rPr>
-              <a:t>The bonded outside region supplies the clamp.</a:t>
-            </a:r>
-          </a:p>
-        </p:txBody>
-      </p:sp>
-      <p:sp>
-        <p:nvSpPr>
-          <p:cNvPr id="107" name="C4-E16 text 105" descr="sci-ppt:o105"/>
-          <p:cNvSpPr txBox="1"/>
-          <p:nvPr/>
-        </p:nvSpPr>
-        <p:spPr>
-          <a:xfrm>
-            <a:off x="320040" y="6473952"/>
-            <a:ext cx="11430000" cy="256032"/>
-          </a:xfrm>
-          <a:prstGeom prst="rect">
-            <a:avLst/>
-          </a:prstGeom>
-          <a:noFill/>
-          <a:effectLst/>
-        </p:spPr>
-        <p:txBody>
-          <a:bodyPr wrap="square" lIns="27432" rIns="27432" tIns="18288" bIns="18288" anchor="ctr">
+          <a:bodyPr wrap="none" lIns="18288" rIns="18288" tIns="18288" bIns="18288" anchor="t">
             <a:spAutoFit/>
           </a:bodyPr>
           <a:lstStyle/>
@@ -5731,7 +4975,7 @@
                 </a:solidFill>
                 <a:latin typeface="Arial"/>
               </a:rPr>
-              <a:t>Model schematic; geometry is not to scale.</a:t>
+              <a:t>Exact solution of Eq. C4-E16, drawn as w/w(0) = (1 − (r/b)²)².</a:t>
             </a:r>
           </a:p>
         </p:txBody>
